--- a/curso/pptx/S38.pptx
+++ b/curso/pptx/S38.pptx
@@ -3891,8 +3891,8 @@
         </p:nvSpPr>
         <p:spPr>
           <a:xfrm>
-            <a:off x="640000" y="420000"/>
-            <a:ext cx="10912000" cy="420000"/>
+            <a:off x="10652000" y="380000"/>
+            <a:ext cx="900000" cy="800000"/>
           </a:xfrm>
           <a:prstGeom prst="rect">
             <a:avLst/>
@@ -3907,17 +3907,17 @@
           <a:p>
             <a:pPr>
               <a:spcAft>
-                <a:spcPts val="810"/>
+                <a:spcPts val="1980"/>
               </a:spcAft>
             </a:pPr>
             <a:r>
-              <a:rPr sz="1800" b="1">
+              <a:rPr sz="4400" b="0">
                 <a:solidFill>
                   <a:srgbClr val="1F2A44"/>
                 </a:solidFill>
                 <a:latin typeface="Nunito Sans"/>
               </a:rPr>
-              <a:t>🦉 Aula de Filosofía</a:t>
+              <a:t>🙃</a:t>
             </a:r>
           </a:p>
         </p:txBody>

--- a/curso/pptx/S38.pptx
+++ b/curso/pptx/S38.pptx
@@ -472,426 +472,6 @@
     </a:lvl9pPr>
   </p:notesStyle>
 </p:notesMaster>
-</file>
-
-<file path=ppt/notesSlides/notesSlide1.xml><?xml version="1.0" encoding="utf-8"?>
-<p:notes xmlns:a="http://schemas.openxmlformats.org/drawingml/2006/main" xmlns:p="http://schemas.openxmlformats.org/presentationml/2006/main" xmlns:r="http://schemas.openxmlformats.org/officeDocument/2006/relationships">
-  <p:cSld>
-    <p:spTree>
-      <p:nvGrpSpPr>
-        <p:cNvPr id="1" name=""/>
-        <p:cNvGrpSpPr/>
-        <p:nvPr/>
-      </p:nvGrpSpPr>
-      <p:grpSpPr>
-        <a:xfrm>
-          <a:off x="0" y="0"/>
-          <a:ext cx="0" cy="0"/>
-          <a:chOff x="0" y="0"/>
-          <a:chExt cx="0" cy="0"/>
-        </a:xfrm>
-      </p:grpSpPr>
-      <p:sp>
-        <p:nvSpPr>
-          <p:cNvPr id="2" name="Slide Image Placeholder 1"/>
-          <p:cNvSpPr>
-            <a:spLocks noGrp="1"/>
-          </p:cNvSpPr>
-          <p:nvPr>
-            <p:ph type="sldImg" idx="2"/>
-          </p:nvPr>
-        </p:nvSpPr>
-        <p:spPr/>
-      </p:sp>
-      <p:sp>
-        <p:nvSpPr>
-          <p:cNvPr id="3" name="Notes Placeholder 2"/>
-          <p:cNvSpPr>
-            <a:spLocks noGrp="1"/>
-          </p:cNvSpPr>
-          <p:nvPr>
-            <p:ph type="body" idx="3" sz="quarter"/>
-          </p:nvPr>
-        </p:nvSpPr>
-        <p:spPr/>
-        <p:txBody>
-          <a:bodyPr/>
-          <a:lstStyle/>
-          <a:p>
-            <a:r>
-              <a:t>3 minutos. Sin apuntes. Es para recordar, no cuenta para nota.</a:t>
-            </a:r>
-          </a:p>
-        </p:txBody>
-      </p:sp>
-      <p:sp>
-        <p:nvSpPr>
-          <p:cNvPr id="4" name="Slide Number Placeholder 3"/>
-          <p:cNvSpPr>
-            <a:spLocks noGrp="1"/>
-          </p:cNvSpPr>
-          <p:nvPr>
-            <p:ph type="sldNum" idx="5" sz="quarter"/>
-          </p:nvPr>
-        </p:nvSpPr>
-        <p:spPr/>
-      </p:sp>
-    </p:spTree>
-  </p:cSld>
-  <p:clrMapOvr>
-    <a:masterClrMapping/>
-  </p:clrMapOvr>
-</p:notes>
-</file>
-
-<file path=ppt/notesSlides/notesSlide2.xml><?xml version="1.0" encoding="utf-8"?>
-<p:notes xmlns:a="http://schemas.openxmlformats.org/drawingml/2006/main" xmlns:p="http://schemas.openxmlformats.org/presentationml/2006/main" xmlns:r="http://schemas.openxmlformats.org/officeDocument/2006/relationships">
-  <p:cSld>
-    <p:spTree>
-      <p:nvGrpSpPr>
-        <p:cNvPr id="1" name=""/>
-        <p:cNvGrpSpPr/>
-        <p:nvPr/>
-      </p:nvGrpSpPr>
-      <p:grpSpPr>
-        <a:xfrm>
-          <a:off x="0" y="0"/>
-          <a:ext cx="0" cy="0"/>
-          <a:chOff x="0" y="0"/>
-          <a:chExt cx="0" cy="0"/>
-        </a:xfrm>
-      </p:grpSpPr>
-      <p:sp>
-        <p:nvSpPr>
-          <p:cNvPr id="2" name="Slide Image Placeholder 1"/>
-          <p:cNvSpPr>
-            <a:spLocks noGrp="1"/>
-          </p:cNvSpPr>
-          <p:nvPr>
-            <p:ph type="sldImg" idx="2"/>
-          </p:nvPr>
-        </p:nvSpPr>
-        <p:spPr/>
-      </p:sp>
-      <p:sp>
-        <p:nvSpPr>
-          <p:cNvPr id="3" name="Notes Placeholder 2"/>
-          <p:cNvSpPr>
-            <a:spLocks noGrp="1"/>
-          </p:cNvSpPr>
-          <p:nvPr>
-            <p:ph type="body" idx="3" sz="quarter"/>
-          </p:nvPr>
-        </p:nvSpPr>
-        <p:spPr/>
-        <p:txBody>
-          <a:bodyPr/>
-          <a:lstStyle/>
-          <a:p>
-            <a:r>
-              <a:t>3 minutos. Sin apuntes. Es para recordar, no cuenta para nota.</a:t>
-            </a:r>
-          </a:p>
-        </p:txBody>
-      </p:sp>
-      <p:sp>
-        <p:nvSpPr>
-          <p:cNvPr id="4" name="Slide Number Placeholder 3"/>
-          <p:cNvSpPr>
-            <a:spLocks noGrp="1"/>
-          </p:cNvSpPr>
-          <p:nvPr>
-            <p:ph type="sldNum" idx="5" sz="quarter"/>
-          </p:nvPr>
-        </p:nvSpPr>
-        <p:spPr/>
-      </p:sp>
-    </p:spTree>
-  </p:cSld>
-  <p:clrMapOvr>
-    <a:masterClrMapping/>
-  </p:clrMapOvr>
-</p:notes>
-</file>
-
-<file path=ppt/notesSlides/notesSlide3.xml><?xml version="1.0" encoding="utf-8"?>
-<p:notes xmlns:a="http://schemas.openxmlformats.org/drawingml/2006/main" xmlns:p="http://schemas.openxmlformats.org/presentationml/2006/main" xmlns:r="http://schemas.openxmlformats.org/officeDocument/2006/relationships">
-  <p:cSld>
-    <p:spTree>
-      <p:nvGrpSpPr>
-        <p:cNvPr id="1" name=""/>
-        <p:cNvGrpSpPr/>
-        <p:nvPr/>
-      </p:nvGrpSpPr>
-      <p:grpSpPr>
-        <a:xfrm>
-          <a:off x="0" y="0"/>
-          <a:ext cx="0" cy="0"/>
-          <a:chOff x="0" y="0"/>
-          <a:chExt cx="0" cy="0"/>
-        </a:xfrm>
-      </p:grpSpPr>
-      <p:sp>
-        <p:nvSpPr>
-          <p:cNvPr id="2" name="Slide Image Placeholder 1"/>
-          <p:cNvSpPr>
-            <a:spLocks noGrp="1"/>
-          </p:cNvSpPr>
-          <p:nvPr>
-            <p:ph type="sldImg" idx="2"/>
-          </p:nvPr>
-        </p:nvSpPr>
-        <p:spPr/>
-      </p:sp>
-      <p:sp>
-        <p:nvSpPr>
-          <p:cNvPr id="3" name="Notes Placeholder 2"/>
-          <p:cNvSpPr>
-            <a:spLocks noGrp="1"/>
-          </p:cNvSpPr>
-          <p:nvPr>
-            <p:ph type="body" idx="3" sz="quarter"/>
-          </p:nvPr>
-        </p:nvSpPr>
-        <p:spPr/>
-        <p:txBody>
-          <a:bodyPr/>
-          <a:lstStyle/>
-          <a:p>
-            <a:r>
-              <a:t>Nadie tiene que contestar: solo pensarlo.</a:t>
-            </a:r>
-          </a:p>
-        </p:txBody>
-      </p:sp>
-      <p:sp>
-        <p:nvSpPr>
-          <p:cNvPr id="4" name="Slide Number Placeholder 3"/>
-          <p:cNvSpPr>
-            <a:spLocks noGrp="1"/>
-          </p:cNvSpPr>
-          <p:nvPr>
-            <p:ph type="sldNum" idx="5" sz="quarter"/>
-          </p:nvPr>
-        </p:nvSpPr>
-        <p:spPr/>
-      </p:sp>
-    </p:spTree>
-  </p:cSld>
-  <p:clrMapOvr>
-    <a:masterClrMapping/>
-  </p:clrMapOvr>
-</p:notes>
-</file>
-
-<file path=ppt/notesSlides/notesSlide4.xml><?xml version="1.0" encoding="utf-8"?>
-<p:notes xmlns:a="http://schemas.openxmlformats.org/drawingml/2006/main" xmlns:p="http://schemas.openxmlformats.org/presentationml/2006/main" xmlns:r="http://schemas.openxmlformats.org/officeDocument/2006/relationships">
-  <p:cSld>
-    <p:spTree>
-      <p:nvGrpSpPr>
-        <p:cNvPr id="1" name=""/>
-        <p:cNvGrpSpPr/>
-        <p:nvPr/>
-      </p:nvGrpSpPr>
-      <p:grpSpPr>
-        <a:xfrm>
-          <a:off x="0" y="0"/>
-          <a:ext cx="0" cy="0"/>
-          <a:chOff x="0" y="0"/>
-          <a:chExt cx="0" cy="0"/>
-        </a:xfrm>
-      </p:grpSpPr>
-      <p:sp>
-        <p:nvSpPr>
-          <p:cNvPr id="2" name="Slide Image Placeholder 1"/>
-          <p:cNvSpPr>
-            <a:spLocks noGrp="1"/>
-          </p:cNvSpPr>
-          <p:nvPr>
-            <p:ph type="sldImg" idx="2"/>
-          </p:nvPr>
-        </p:nvSpPr>
-        <p:spPr/>
-      </p:sp>
-      <p:sp>
-        <p:nvSpPr>
-          <p:cNvPr id="3" name="Notes Placeholder 2"/>
-          <p:cNvSpPr>
-            <a:spLocks noGrp="1"/>
-          </p:cNvSpPr>
-          <p:nvPr>
-            <p:ph type="body" idx="3" sz="quarter"/>
-          </p:nvPr>
-        </p:nvSpPr>
-        <p:spPr/>
-        <p:txBody>
-          <a:bodyPr/>
-          <a:lstStyle/>
-          <a:p>
-            <a:r>
-              <a:t>Dejar unos segundos para que piensen la respuesta fácil antes de enseñar los pasos.</a:t>
-            </a:r>
-          </a:p>
-        </p:txBody>
-      </p:sp>
-      <p:sp>
-        <p:nvSpPr>
-          <p:cNvPr id="4" name="Slide Number Placeholder 3"/>
-          <p:cNvSpPr>
-            <a:spLocks noGrp="1"/>
-          </p:cNvSpPr>
-          <p:nvPr>
-            <p:ph type="sldNum" idx="5" sz="quarter"/>
-          </p:nvPr>
-        </p:nvSpPr>
-        <p:spPr/>
-      </p:sp>
-    </p:spTree>
-  </p:cSld>
-  <p:clrMapOvr>
-    <a:masterClrMapping/>
-  </p:clrMapOvr>
-</p:notes>
-</file>
-
-<file path=ppt/notesSlides/notesSlide5.xml><?xml version="1.0" encoding="utf-8"?>
-<p:notes xmlns:a="http://schemas.openxmlformats.org/drawingml/2006/main" xmlns:p="http://schemas.openxmlformats.org/presentationml/2006/main" xmlns:r="http://schemas.openxmlformats.org/officeDocument/2006/relationships">
-  <p:cSld>
-    <p:spTree>
-      <p:nvGrpSpPr>
-        <p:cNvPr id="1" name=""/>
-        <p:cNvGrpSpPr/>
-        <p:nvPr/>
-      </p:nvGrpSpPr>
-      <p:grpSpPr>
-        <a:xfrm>
-          <a:off x="0" y="0"/>
-          <a:ext cx="0" cy="0"/>
-          <a:chOff x="0" y="0"/>
-          <a:chExt cx="0" cy="0"/>
-        </a:xfrm>
-      </p:grpSpPr>
-      <p:sp>
-        <p:nvSpPr>
-          <p:cNvPr id="2" name="Slide Image Placeholder 1"/>
-          <p:cNvSpPr>
-            <a:spLocks noGrp="1"/>
-          </p:cNvSpPr>
-          <p:nvPr>
-            <p:ph type="sldImg" idx="2"/>
-          </p:nvPr>
-        </p:nvSpPr>
-        <p:spPr/>
-      </p:sp>
-      <p:sp>
-        <p:nvSpPr>
-          <p:cNvPr id="3" name="Notes Placeholder 2"/>
-          <p:cNvSpPr>
-            <a:spLocks noGrp="1"/>
-          </p:cNvSpPr>
-          <p:nvPr>
-            <p:ph type="body" idx="3" sz="quarter"/>
-          </p:nvPr>
-        </p:nvSpPr>
-        <p:spPr/>
-        <p:txBody>
-          <a:bodyPr/>
-          <a:lstStyle/>
-          <a:p>
-            <a:r>
-              <a:t>Dejar 2 minutos para que lo escriban. La diapositiva siguiente muestra el resumen.</a:t>
-            </a:r>
-          </a:p>
-        </p:txBody>
-      </p:sp>
-      <p:sp>
-        <p:nvSpPr>
-          <p:cNvPr id="4" name="Slide Number Placeholder 3"/>
-          <p:cNvSpPr>
-            <a:spLocks noGrp="1"/>
-          </p:cNvSpPr>
-          <p:nvPr>
-            <p:ph type="sldNum" idx="5" sz="quarter"/>
-          </p:nvPr>
-        </p:nvSpPr>
-        <p:spPr/>
-      </p:sp>
-    </p:spTree>
-  </p:cSld>
-  <p:clrMapOvr>
-    <a:masterClrMapping/>
-  </p:clrMapOvr>
-</p:notes>
-</file>
-
-<file path=ppt/notesSlides/notesSlide6.xml><?xml version="1.0" encoding="utf-8"?>
-<p:notes xmlns:a="http://schemas.openxmlformats.org/drawingml/2006/main" xmlns:p="http://schemas.openxmlformats.org/presentationml/2006/main" xmlns:r="http://schemas.openxmlformats.org/officeDocument/2006/relationships">
-  <p:cSld>
-    <p:spTree>
-      <p:nvGrpSpPr>
-        <p:cNvPr id="1" name=""/>
-        <p:cNvGrpSpPr/>
-        <p:nvPr/>
-      </p:nvGrpSpPr>
-      <p:grpSpPr>
-        <a:xfrm>
-          <a:off x="0" y="0"/>
-          <a:ext cx="0" cy="0"/>
-          <a:chOff x="0" y="0"/>
-          <a:chExt cx="0" cy="0"/>
-        </a:xfrm>
-      </p:grpSpPr>
-      <p:sp>
-        <p:nvSpPr>
-          <p:cNvPr id="2" name="Slide Image Placeholder 1"/>
-          <p:cNvSpPr>
-            <a:spLocks noGrp="1"/>
-          </p:cNvSpPr>
-          <p:nvPr>
-            <p:ph type="sldImg" idx="2"/>
-          </p:nvPr>
-        </p:nvSpPr>
-        <p:spPr/>
-      </p:sp>
-      <p:sp>
-        <p:nvSpPr>
-          <p:cNvPr id="3" name="Notes Placeholder 2"/>
-          <p:cNvSpPr>
-            <a:spLocks noGrp="1"/>
-          </p:cNvSpPr>
-          <p:nvPr>
-            <p:ph type="body" idx="3" sz="quarter"/>
-          </p:nvPr>
-        </p:nvSpPr>
-        <p:spPr/>
-        <p:txBody>
-          <a:bodyPr/>
-          <a:lstStyle/>
-          <a:p>
-            <a:r>
-              <a:t>Buscar: «gráficos engañosos» · «cómo mentir con gráficos»</a:t>
-            </a:r>
-          </a:p>
-        </p:txBody>
-      </p:sp>
-      <p:sp>
-        <p:nvSpPr>
-          <p:cNvPr id="4" name="Slide Number Placeholder 3"/>
-          <p:cNvSpPr>
-            <a:spLocks noGrp="1"/>
-          </p:cNvSpPr>
-          <p:nvPr>
-            <p:ph type="sldNum" idx="5" sz="quarter"/>
-          </p:nvPr>
-        </p:nvSpPr>
-        <p:spPr/>
-      </p:sp>
-    </p:spTree>
-  </p:cSld>
-  <p:clrMapOvr>
-    <a:masterClrMapping/>
-  </p:clrMapOvr>
-</p:notes>
 </file>
 
 <file path=ppt/slideLayouts/slideLayout1.xml><?xml version="1.0" encoding="utf-8"?>

--- a/curso/pptx/S38.pptx
+++ b/curso/pptx/S38.pptx
@@ -7188,7 +7188,7 @@
                           </a:solidFill>
                           <a:latin typeface="Nunito Sans"/>
                         </a:rPr>
-                        <a:t>Aitor: 92 puntos</a:t>
+                        <a:t>Una chica: 92 puntos</a:t>
                       </a:r>
                     </a:p>
                   </a:txBody>
@@ -7256,7 +7256,7 @@
                           </a:solidFill>
                           <a:latin typeface="Nunito Sans"/>
                         </a:rPr>
-                        <a:t>Chen: 98 puntos</a:t>
+                        <a:t>Un chico: 98 puntos</a:t>
                       </a:r>
                     </a:p>
                   </a:txBody>
@@ -7368,7 +7368,7 @@
                           </a:solidFill>
                           <a:latin typeface="Nunito Sans"/>
                         </a:rPr>
-                        <a:t>¡Chen tiene cuatro veces más!</a:t>
+                        <a:t>¡El chico tiene cuatro veces más!</a:t>
                       </a:r>
                     </a:p>
                   </a:txBody>

--- a/curso/pptx/S38.pptx
+++ b/curso/pptx/S38.pptx
@@ -23,6 +23,7 @@
     <p:sldId id="271" r:id="rId23"/>
     <p:sldId id="272" r:id="rId24"/>
     <p:sldId id="273" r:id="rId25"/>
+    <p:sldId id="274" r:id="rId26"/>
   </p:sldIdLst>
   <p:sldSz cx="12192000" cy="6858000" type="screen4x3"/>
   <p:notesSz cx="6858000" cy="9144000"/>
@@ -3536,7 +3537,7 @@
                 </a:solidFill>
                 <a:latin typeface="Nunito Sans"/>
               </a:rPr>
-              <a:t>PENSAMIENTO CRÍTICO · SESIÓN 38 · UNIDAD 7 · NÚMEROS QUE ENGAÑAN</a:t>
+              <a:t>PENSAMIENTO CRÍTICO · SESIÓN 38 · UNIDAD 7 · EMOCIONES, CONFLICTOS Y DILEMAS</a:t>
             </a:r>
           </a:p>
         </p:txBody>
@@ -3575,7 +3576,7 @@
                 </a:solidFill>
                 <a:latin typeface="Fredoka"/>
               </a:rPr>
-              <a:t>Gráficos engañosos</a:t>
+              <a:t>¿Para qué sirven las emociones?</a:t>
             </a:r>
           </a:p>
         </p:txBody>
@@ -3614,7 +3615,7 @@
                 </a:solidFill>
                 <a:latin typeface="Nunito Sans"/>
               </a:rPr>
-              <a:t>Un gráfico puede engañar aunque los datos sean verdad: con el eje cortado, una escala rara, colores que asustan o fechas recortadas.</a:t>
+              <a:t>Las emociones no son buenas ni malas: informan de lo que nos importa. Pero pueden equivocarse, y decidir en caliente suele salir mal.</a:t>
             </a:r>
           </a:p>
         </p:txBody>
@@ -3822,7 +3823,7 @@
                 </a:solidFill>
                 <a:latin typeface="Fredoka"/>
               </a:rPr>
-              <a:t>Caso 1 · El precio del bocadillo</a:t>
+              <a:t>Caso 1 · El mensaje sin contestar</a:t>
             </a:r>
           </a:p>
         </p:txBody>
@@ -3904,7 +3905,7 @@
                 </a:solidFill>
                 <a:latin typeface="Nunito Sans"/>
               </a:rPr>
-              <a:t>Un gráfico del bar: el bocadillo pasa de 2,00 € a 2,20 €. La barra nueva parece el triple de alta. (Ejemplo inventado.)</a:t>
+              <a:t>Una chica piensa: «Mi amiga pasa de mí» y se enfada. Una hora después, la amiga escribe: «Perdona, me quedé sin batería en el metro».</a:t>
             </a:r>
           </a:p>
         </p:txBody>
@@ -3952,7 +3953,7 @@
                 </a:solidFill>
                 <a:latin typeface="Nunito Sans"/>
               </a:rPr>
-              <a:t>Miro el eje: empieza en 1,90 €, no en 0.</a:t>
+              <a:t>¿Qué pasó? La amiga leyó el mensaje y no contestó.</a:t>
             </a:r>
           </a:p>
           <a:p>
@@ -3977,7 +3978,7 @@
                 </a:solidFill>
                 <a:latin typeface="Nunito Sans"/>
               </a:rPr>
-              <a:t>Desde 1,90, la barra de 2,00 mide 0,10 y la de 2,20 mide 0,30: el triple.</a:t>
+              <a:t>¿Qué idea tuvo la chica? «Pasa de mí». De esa idea salió el enfado.</a:t>
             </a:r>
           </a:p>
           <a:p>
@@ -4002,7 +4003,7 @@
                 </a:solidFill>
                 <a:latin typeface="Nunito Sans"/>
               </a:rPr>
-              <a:t>Pero el precio real ha subido 20 céntimos: un 10 %.</a:t>
+              <a:t>¿Cómo lo sabía? No lo sabía: había otras explicaciones posibles.</a:t>
             </a:r>
           </a:p>
           <a:p>
@@ -4027,7 +4028,7 @@
                 </a:solidFill>
                 <a:latin typeface="Nunito Sans"/>
               </a:rPr>
-              <a:t>Conclusión: el eje cortado hace que una subida del 10 % parezca el triple.</a:t>
+              <a:t>Conclusión: muchas veces sentimos lo que sentimos por la idea que nos hacemos. Y la idea puede ser falsa.</a:t>
             </a:r>
           </a:p>
         </p:txBody>
@@ -4131,7 +4132,7 @@
                 </a:solidFill>
                 <a:latin typeface="Fredoka"/>
               </a:rPr>
-              <a:t>Caso 2 · El mapa rojo</a:t>
+              <a:t>Caso 2 · Decidir en caliente</a:t>
             </a:r>
           </a:p>
         </p:txBody>
@@ -4213,7 +4214,7 @@
                 </a:solidFill>
                 <a:latin typeface="Nunito Sans"/>
               </a:rPr>
-              <a:t>Un mapa de Bizkaia pinta de rojo intenso los pueblos donde «suben los robos de bicis». (Ejemplo inventado.)</a:t>
+              <a:t>En Aste Nagusia, a un chico se le cae el bocadillo porque otro le empuja sin querer. El primero, furioso, le suelta un insulto delante de todos.</a:t>
             </a:r>
           </a:p>
         </p:txBody>
@@ -4261,7 +4262,7 @@
                 </a:solidFill>
                 <a:latin typeface="Nunito Sans"/>
               </a:rPr>
-              <a:t>El rojo intenso da sensación de peligro.</a:t>
+              <a:t>¿Era razonable enfadarse? Sí: ha perdido la cena. El enfado informa de algo real.</a:t>
             </a:r>
           </a:p>
           <a:p>
@@ -4286,7 +4287,7 @@
                 </a:solidFill>
                 <a:latin typeface="Nunito Sans"/>
               </a:rPr>
-              <a:t>Miro los números: en muchos pueblos se pasa de 1 robo a 2.</a:t>
+              <a:t>¿Era buena la decisión? No: decidió en caliente, sin mirar si fue sin querer.</a:t>
             </a:r>
           </a:p>
           <a:p>
@@ -4311,7 +4312,7 @@
                 </a:solidFill>
                 <a:latin typeface="Nunito Sans"/>
               </a:rPr>
-              <a:t>La leyenda usa el mismo rojo para cualquier subida, sea de 1 o de 100.</a:t>
+              <a:t>En caliente pensamos peor: decidimos rápido y sin razones (sesión 22).</a:t>
             </a:r>
           </a:p>
           <a:p>
@@ -4336,7 +4337,7 @@
                 </a:solidFill>
                 <a:latin typeface="Nunito Sans"/>
               </a:rPr>
-              <a:t>Conclusión: el color transmite una emoción que los datos no justifican. Leo la leyenda y las cifras.</a:t>
+              <a:t>Conclusión: la emoción puede ser razonable y la decisión, mala. Primero calmarse y esperar, luego decidir.</a:t>
             </a:r>
           </a:p>
         </p:txBody>
@@ -4350,315 +4351,6 @@
 </file>
 
 <file path=ppt/slides/slide13.xml><?xml version="1.0" encoding="utf-8"?>
-<p:sld xmlns:a="http://schemas.openxmlformats.org/drawingml/2006/main" xmlns:p="http://schemas.openxmlformats.org/presentationml/2006/main" xmlns:r="http://schemas.openxmlformats.org/officeDocument/2006/relationships">
-  <p:cSld>
-    <p:bg>
-      <p:bgPr>
-        <a:solidFill>
-          <a:srgbClr val="FBF7EF"/>
-        </a:solidFill>
-        <a:effectLst/>
-      </p:bgPr>
-    </p:bg>
-    <p:spTree>
-      <p:nvGrpSpPr>
-        <p:cNvPr id="1" name=""/>
-        <p:cNvGrpSpPr/>
-        <p:nvPr/>
-      </p:nvGrpSpPr>
-      <p:grpSpPr/>
-      <p:sp>
-        <p:nvSpPr>
-          <p:cNvPr id="2" name="TextBox 1"/>
-          <p:cNvSpPr txBox="1"/>
-          <p:nvPr/>
-        </p:nvSpPr>
-        <p:spPr>
-          <a:xfrm>
-            <a:off x="640000" y="380000"/>
-            <a:ext cx="10912000" cy="420000"/>
-          </a:xfrm>
-          <a:prstGeom prst="rect">
-            <a:avLst/>
-          </a:prstGeom>
-          <a:noFill/>
-        </p:spPr>
-        <p:txBody>
-          <a:bodyPr wrap="square">
-            <a:spAutoFit/>
-          </a:bodyPr>
-          <a:lstStyle/>
-          <a:p>
-            <a:pPr>
-              <a:spcAft>
-                <a:spcPts val="630"/>
-              </a:spcAft>
-            </a:pPr>
-            <a:r>
-              <a:rPr sz="1400" b="1">
-                <a:solidFill>
-                  <a:srgbClr val="E8793A"/>
-                </a:solidFill>
-                <a:latin typeface="Nunito Sans"/>
-              </a:rPr>
-              <a:t>BLOQUE 2 · CASOS RESUELTOS</a:t>
-            </a:r>
-          </a:p>
-        </p:txBody>
-      </p:sp>
-      <p:sp>
-        <p:nvSpPr>
-          <p:cNvPr id="3" name="TextBox 2"/>
-          <p:cNvSpPr txBox="1"/>
-          <p:nvPr/>
-        </p:nvSpPr>
-        <p:spPr>
-          <a:xfrm>
-            <a:off x="640000" y="760000"/>
-            <a:ext cx="10912000" cy="800000"/>
-          </a:xfrm>
-          <a:prstGeom prst="rect">
-            <a:avLst/>
-          </a:prstGeom>
-          <a:noFill/>
-        </p:spPr>
-        <p:txBody>
-          <a:bodyPr wrap="square">
-            <a:spAutoFit/>
-          </a:bodyPr>
-          <a:lstStyle/>
-          <a:p>
-            <a:pPr>
-              <a:spcAft>
-                <a:spcPts val="1710"/>
-              </a:spcAft>
-            </a:pPr>
-            <a:r>
-              <a:rPr sz="3800" b="1">
-                <a:solidFill>
-                  <a:srgbClr val="1F2A44"/>
-                </a:solidFill>
-                <a:latin typeface="Fredoka"/>
-              </a:rPr>
-              <a:t>Caso 3 · Solo los meses buenos</a:t>
-            </a:r>
-          </a:p>
-        </p:txBody>
-      </p:sp>
-      <p:sp>
-        <p:nvSpPr>
-          <p:cNvPr id="4" name="Rectangle 3"/>
-          <p:cNvSpPr/>
-          <p:nvPr/>
-        </p:nvSpPr>
-        <p:spPr>
-          <a:xfrm>
-            <a:off x="640000" y="1600000"/>
-            <a:ext cx="10912000" cy="1100000"/>
-          </a:xfrm>
-          <a:prstGeom prst="rect">
-            <a:avLst/>
-          </a:prstGeom>
-          <a:solidFill>
-            <a:srgbClr val="FFFFFF"/>
-          </a:solidFill>
-          <a:ln>
-            <a:noFill/>
-          </a:ln>
-        </p:spPr>
-        <p:style>
-          <a:lnRef idx="1">
-            <a:schemeClr val="accent1"/>
-          </a:lnRef>
-          <a:fillRef idx="3">
-            <a:schemeClr val="accent1"/>
-          </a:fillRef>
-          <a:effectRef idx="2">
-            <a:schemeClr val="accent1"/>
-          </a:effectRef>
-          <a:fontRef idx="minor">
-            <a:schemeClr val="lt1"/>
-          </a:fontRef>
-        </p:style>
-        <p:txBody>
-          <a:bodyPr rtlCol="0" anchor="ctr"/>
-          <a:lstStyle/>
-          <a:p>
-            <a:pPr algn="ctr"/>
-          </a:p>
-        </p:txBody>
-      </p:sp>
-      <p:sp>
-        <p:nvSpPr>
-          <p:cNvPr id="5" name="TextBox 4"/>
-          <p:cNvSpPr txBox="1"/>
-          <p:nvPr/>
-        </p:nvSpPr>
-        <p:spPr>
-          <a:xfrm>
-            <a:off x="840000" y="1650000"/>
-            <a:ext cx="10512000" cy="1000000"/>
-          </a:xfrm>
-          <a:prstGeom prst="rect">
-            <a:avLst/>
-          </a:prstGeom>
-          <a:noFill/>
-        </p:spPr>
-        <p:txBody>
-          <a:bodyPr wrap="square" anchor="ctr">
-            <a:spAutoFit/>
-          </a:bodyPr>
-          <a:lstStyle/>
-          <a:p>
-            <a:pPr>
-              <a:spcAft>
-                <a:spcPts val="1170"/>
-              </a:spcAft>
-            </a:pPr>
-            <a:r>
-              <a:rPr sz="2600" b="1">
-                <a:solidFill>
-                  <a:srgbClr val="1F2A44"/>
-                </a:solidFill>
-                <a:latin typeface="Nunito Sans"/>
-              </a:rPr>
-              <a:t>Un youtuber enseña un gráfico: sus seguidores suben de marzo a junio. «¡Crezco sin parar!» (Ejemplo inventado.)</a:t>
-            </a:r>
-          </a:p>
-        </p:txBody>
-      </p:sp>
-      <p:sp>
-        <p:nvSpPr>
-          <p:cNvPr id="6" name="TextBox 5"/>
-          <p:cNvSpPr txBox="1"/>
-          <p:nvPr/>
-        </p:nvSpPr>
-        <p:spPr>
-          <a:xfrm>
-            <a:off x="640000" y="2900000"/>
-            <a:ext cx="10912000" cy="3500000"/>
-          </a:xfrm>
-          <a:prstGeom prst="rect">
-            <a:avLst/>
-          </a:prstGeom>
-          <a:noFill/>
-        </p:spPr>
-        <p:txBody>
-          <a:bodyPr wrap="square">
-            <a:spAutoFit/>
-          </a:bodyPr>
-          <a:lstStyle/>
-          <a:p>
-            <a:pPr>
-              <a:spcAft>
-                <a:spcPts val="1080"/>
-              </a:spcAft>
-            </a:pPr>
-            <a:r>
-              <a:rPr sz="2400" b="1">
-                <a:solidFill>
-                  <a:srgbClr val="E8793A"/>
-                </a:solidFill>
-                <a:latin typeface="Nunito Sans"/>
-              </a:rPr>
-              <a:t>1. </a:t>
-            </a:r>
-            <a:r>
-              <a:rPr sz="2400" b="0">
-                <a:solidFill>
-                  <a:srgbClr val="1F2A44"/>
-                </a:solidFill>
-                <a:latin typeface="Nunito Sans"/>
-              </a:rPr>
-              <a:t>¿Qué fechas enseña? Solo de marzo a junio.</a:t>
-            </a:r>
-          </a:p>
-          <a:p>
-            <a:pPr>
-              <a:spcAft>
-                <a:spcPts val="1080"/>
-              </a:spcAft>
-            </a:pPr>
-            <a:r>
-              <a:rPr sz="2400" b="1">
-                <a:solidFill>
-                  <a:srgbClr val="E8793A"/>
-                </a:solidFill>
-                <a:latin typeface="Nunito Sans"/>
-              </a:rPr>
-              <a:t>2. </a:t>
-            </a:r>
-            <a:r>
-              <a:rPr sz="2400" b="0">
-                <a:solidFill>
-                  <a:srgbClr val="1F2A44"/>
-                </a:solidFill>
-                <a:latin typeface="Nunito Sans"/>
-              </a:rPr>
-              <a:t>¿Y el resto del año? En enero tenía más seguidores que en junio.</a:t>
-            </a:r>
-          </a:p>
-          <a:p>
-            <a:pPr>
-              <a:spcAft>
-                <a:spcPts val="1080"/>
-              </a:spcAft>
-            </a:pPr>
-            <a:r>
-              <a:rPr sz="2400" b="1">
-                <a:solidFill>
-                  <a:srgbClr val="E8793A"/>
-                </a:solidFill>
-                <a:latin typeface="Nunito Sans"/>
-              </a:rPr>
-              <a:t>3. </a:t>
-            </a:r>
-            <a:r>
-              <a:rPr sz="2400" b="0">
-                <a:solidFill>
-                  <a:srgbClr val="1F2A44"/>
-                </a:solidFill>
-                <a:latin typeface="Nunito Sans"/>
-              </a:rPr>
-              <a:t>Ha recortado el gráfico para enseñar solo la parte que sube.</a:t>
-            </a:r>
-          </a:p>
-          <a:p>
-            <a:pPr>
-              <a:spcAft>
-                <a:spcPts val="1080"/>
-              </a:spcAft>
-            </a:pPr>
-            <a:r>
-              <a:rPr sz="2400" b="1">
-                <a:solidFill>
-                  <a:srgbClr val="E8793A"/>
-                </a:solidFill>
-                <a:latin typeface="Nunito Sans"/>
-              </a:rPr>
-              <a:t>4. </a:t>
-            </a:r>
-            <a:r>
-              <a:rPr sz="2400" b="0">
-                <a:solidFill>
-                  <a:srgbClr val="1F2A44"/>
-                </a:solidFill>
-                <a:latin typeface="Nunito Sans"/>
-              </a:rPr>
-              <a:t>Conclusión: un gráfico también engaña por lo que deja fuera. Pregunto qué fechas faltan.</a:t>
-            </a:r>
-          </a:p>
-        </p:txBody>
-      </p:sp>
-    </p:spTree>
-  </p:cSld>
-  <p:clrMapOvr>
-    <a:masterClrMapping/>
-  </p:clrMapOvr>
-</p:sld>
-</file>
-
-<file path=ppt/slides/slide14.xml><?xml version="1.0" encoding="utf-8"?>
 <p:sld xmlns:a="http://schemas.openxmlformats.org/drawingml/2006/main" xmlns:p="http://schemas.openxmlformats.org/presentationml/2006/main" xmlns:r="http://schemas.openxmlformats.org/officeDocument/2006/relationships">
   <p:cSld>
     <p:bg>
@@ -4749,7 +4441,7 @@
                 </a:solidFill>
                 <a:latin typeface="Fredoka"/>
               </a:rPr>
-              <a:t>⚠ Las temperaturas</a:t>
+              <a:t>⚠ «Las emociones no son malas»</a:t>
             </a:r>
           </a:p>
         </p:txBody>
@@ -4831,7 +4523,7 @@
                 </a:solidFill>
                 <a:latin typeface="Nunito Sans"/>
               </a:rPr>
-              <a:t>Un gráfico de líneas muestra la temperatura media de agosto en Bilbao durante 30 años. El eje va de 18 °C a 22 °C. (Ejemplo inventado.)</a:t>
+              <a:t>Un chico empuja a otro en el patio. Luego explica: «Estaba enfadado. Y en clase dijimos que las emociones no son malas».</a:t>
             </a:r>
           </a:p>
         </p:txBody>
@@ -4879,7 +4571,7 @@
                 </a:solidFill>
                 <a:latin typeface="Nunito Sans"/>
               </a:rPr>
-              <a:t>El eje no empieza en 0. ¿Es un gráfico engañoso?</a:t>
+              <a:t>Si las emociones no son malas, ¿ese chico no ha hecho nada malo?</a:t>
             </a:r>
           </a:p>
           <a:p>
@@ -4904,7 +4596,7 @@
                 </a:solidFill>
                 <a:latin typeface="Nunito Sans"/>
               </a:rPr>
-              <a:t>En las barras, el largo es la cantidad: por eso su eje debe empezar en 0.</a:t>
+              <a:t>Parece que ese chico tiene razón: hemos dicho que enfadarse no es malo.</a:t>
             </a:r>
           </a:p>
           <a:p>
@@ -4929,7 +4621,7 @@
                 </a:solidFill>
                 <a:latin typeface="Nunito Sans"/>
               </a:rPr>
-              <a:t>Aquí hay una línea, y 0 °C no es «nada de calor»: es cuando se hiela el agua.</a:t>
+              <a:t>Pero no se ha limitado a sentir: ha empujado. Eso es una conducta.</a:t>
             </a:r>
           </a:p>
           <a:p>
@@ -4954,7 +4646,7 @@
                 </a:solidFill>
                 <a:latin typeface="Nunito Sans"/>
               </a:rPr>
-              <a:t>Con el eje de 0 a 22, una subida de 1 o 2 grados, que importa mucho, casi no se vería.</a:t>
+              <a:t>Las emociones no se eligen; lo que hacemos con ellas, sí.</a:t>
             </a:r>
           </a:p>
           <a:p>
@@ -4979,7 +4671,111 @@
                 </a:solidFill>
                 <a:latin typeface="Nunito Sans"/>
               </a:rPr>
-              <a:t>Conclusión: un eje que no empieza en 0 no siempre engaña. Pregunto si la diferencia que enseña importa.</a:t>
+              <a:t>Conclusión: el enfado no es malo, pero empujar sí puede serlo. Sentir y hacer son cosas distintas.</a:t>
+            </a:r>
+          </a:p>
+        </p:txBody>
+      </p:sp>
+    </p:spTree>
+  </p:cSld>
+  <p:clrMapOvr>
+    <a:masterClrMapping/>
+  </p:clrMapOvr>
+</p:sld>
+</file>
+
+<file path=ppt/slides/slide14.xml><?xml version="1.0" encoding="utf-8"?>
+<p:sld xmlns:a="http://schemas.openxmlformats.org/drawingml/2006/main" xmlns:p="http://schemas.openxmlformats.org/presentationml/2006/main" xmlns:r="http://schemas.openxmlformats.org/officeDocument/2006/relationships">
+  <p:cSld>
+    <p:bg>
+      <p:bgPr>
+        <a:solidFill>
+          <a:srgbClr val="1F2A44"/>
+        </a:solidFill>
+        <a:effectLst/>
+      </p:bgPr>
+    </p:bg>
+    <p:spTree>
+      <p:nvGrpSpPr>
+        <p:cNvPr id="1" name=""/>
+        <p:cNvGrpSpPr/>
+        <p:nvPr/>
+      </p:nvGrpSpPr>
+      <p:grpSpPr/>
+      <p:sp>
+        <p:nvSpPr>
+          <p:cNvPr id="2" name="TextBox 1"/>
+          <p:cNvSpPr txBox="1"/>
+          <p:nvPr/>
+        </p:nvSpPr>
+        <p:spPr>
+          <a:xfrm>
+            <a:off x="640000" y="2300000"/>
+            <a:ext cx="10912000" cy="500000"/>
+          </a:xfrm>
+          <a:prstGeom prst="rect">
+            <a:avLst/>
+          </a:prstGeom>
+          <a:noFill/>
+        </p:spPr>
+        <p:txBody>
+          <a:bodyPr wrap="square">
+            <a:spAutoFit/>
+          </a:bodyPr>
+          <a:lstStyle/>
+          <a:p>
+            <a:pPr>
+              <a:spcAft>
+                <a:spcPts val="810"/>
+              </a:spcAft>
+            </a:pPr>
+            <a:r>
+              <a:rPr sz="1800" b="1">
+                <a:solidFill>
+                  <a:srgbClr val="F4B183"/>
+                </a:solidFill>
+                <a:latin typeface="Nunito Sans"/>
+              </a:rPr>
+              <a:t>BLOQUE 3</a:t>
+            </a:r>
+          </a:p>
+        </p:txBody>
+      </p:sp>
+      <p:sp>
+        <p:nvSpPr>
+          <p:cNvPr id="3" name="TextBox 2"/>
+          <p:cNvSpPr txBox="1"/>
+          <p:nvPr/>
+        </p:nvSpPr>
+        <p:spPr>
+          <a:xfrm>
+            <a:off x="640000" y="2800000"/>
+            <a:ext cx="10912000" cy="800000"/>
+          </a:xfrm>
+          <a:prstGeom prst="rect">
+            <a:avLst/>
+          </a:prstGeom>
+          <a:noFill/>
+        </p:spPr>
+        <p:txBody>
+          <a:bodyPr wrap="square">
+            <a:spAutoFit/>
+          </a:bodyPr>
+          <a:lstStyle/>
+          <a:p>
+            <a:pPr>
+              <a:spcAft>
+                <a:spcPts val="2160"/>
+              </a:spcAft>
+            </a:pPr>
+            <a:r>
+              <a:rPr sz="4800" b="1">
+                <a:solidFill>
+                  <a:srgbClr val="FBF7EF"/>
+                </a:solidFill>
+                <a:latin typeface="Fredoka"/>
+              </a:rPr>
+              <a:t>Antes de decidir en caliente</a:t>
             </a:r>
           </a:p>
         </p:txBody>
@@ -5044,7 +4840,7 @@
                 </a:solidFill>
                 <a:latin typeface="Nunito Sans"/>
               </a:rPr>
-              <a:t>LO DE HOY EN TRES LÍNEAS</a:t>
+              <a:t>BLOQUE 3 · ANTES DE DECIDIR EN CALIENTE</a:t>
             </a:r>
           </a:p>
         </p:txBody>
@@ -5083,7 +4879,7 @@
                 </a:solidFill>
                 <a:latin typeface="Fredoka"/>
               </a:rPr>
-              <a:t>Escríbelo tú primero, sin mirar</a:t>
+              <a:t>Tres pasos cuando la emoción es fuerte</a:t>
             </a:r>
           </a:p>
         </p:txBody>
@@ -5096,8 +4892,8 @@
         </p:nvSpPr>
         <p:spPr>
           <a:xfrm>
-            <a:off x="640000" y="1800000"/>
-            <a:ext cx="10912000" cy="1500000"/>
+            <a:off x="840000" y="1730000"/>
+            <a:ext cx="10512000" cy="1000000"/>
           </a:xfrm>
           <a:prstGeom prst="rect">
             <a:avLst/>
@@ -5105,6 +4901,45 @@
           <a:noFill/>
         </p:spPr>
         <p:txBody>
+          <a:bodyPr wrap="square" anchor="ctr">
+            <a:spAutoFit/>
+          </a:bodyPr>
+          <a:lstStyle/>
+          <a:p>
+            <a:pPr>
+              <a:spcAft>
+                <a:spcPts val="1080"/>
+              </a:spcAft>
+            </a:pPr>
+            <a:r>
+              <a:rPr sz="2400" b="0">
+                <a:solidFill>
+                  <a:srgbClr val="1F2A44"/>
+                </a:solidFill>
+                <a:latin typeface="Nunito Sans"/>
+              </a:rPr>
+              <a:t>Como vimos en la sesión 22, quien asusta quiere que decidas rápido.</a:t>
+            </a:r>
+          </a:p>
+        </p:txBody>
+      </p:sp>
+      <p:sp>
+        <p:nvSpPr>
+          <p:cNvPr id="5" name="TextBox 4"/>
+          <p:cNvSpPr txBox="1"/>
+          <p:nvPr/>
+        </p:nvSpPr>
+        <p:spPr>
+          <a:xfrm>
+            <a:off x="640000" y="3000000"/>
+            <a:ext cx="10912000" cy="3458000"/>
+          </a:xfrm>
+          <a:prstGeom prst="rect">
+            <a:avLst/>
+          </a:prstGeom>
+          <a:noFill/>
+        </p:spPr>
+        <p:txBody>
           <a:bodyPr wrap="square">
             <a:spAutoFit/>
           </a:bodyPr>
@@ -5112,17 +4947,103 @@
           <a:p>
             <a:pPr>
               <a:spcAft>
-                <a:spcPts val="1170"/>
+                <a:spcPts val="1260"/>
               </a:spcAft>
             </a:pPr>
             <a:r>
-              <a:rPr sz="2600" b="0">
-                <a:solidFill>
-                  <a:srgbClr val="4A5568"/>
-                </a:solidFill>
-                <a:latin typeface="Nunito Sans"/>
-              </a:rPr>
-              <a:t>Dos minutos. Después lo comparamos.</a:t>
+              <a:rPr sz="2800" b="1">
+                <a:solidFill>
+                  <a:srgbClr val="E8793A"/>
+                </a:solidFill>
+                <a:latin typeface="Nunito Sans"/>
+              </a:rPr>
+              <a:t>• </a:t>
+            </a:r>
+            <a:r>
+              <a:rPr sz="2800" b="1">
+                <a:solidFill>
+                  <a:srgbClr val="1F2A44"/>
+                </a:solidFill>
+                <a:latin typeface="Nunito Sans"/>
+              </a:rPr>
+              <a:t>Nombrar:</a:t>
+            </a:r>
+            <a:r>
+              <a:rPr sz="2800" b="0">
+                <a:solidFill>
+                  <a:srgbClr val="1F2A44"/>
+                </a:solidFill>
+                <a:latin typeface="Nunito Sans"/>
+              </a:rPr>
+              <a:t> «Estoy enfadado».</a:t>
+            </a:r>
+          </a:p>
+          <a:p>
+            <a:pPr>
+              <a:spcAft>
+                <a:spcPts val="1260"/>
+              </a:spcAft>
+            </a:pPr>
+            <a:r>
+              <a:rPr sz="2800" b="1">
+                <a:solidFill>
+                  <a:srgbClr val="E8793A"/>
+                </a:solidFill>
+                <a:latin typeface="Nunito Sans"/>
+              </a:rPr>
+              <a:t>• </a:t>
+            </a:r>
+            <a:r>
+              <a:rPr sz="2800" b="1">
+                <a:solidFill>
+                  <a:srgbClr val="1F2A44"/>
+                </a:solidFill>
+                <a:latin typeface="Nunito Sans"/>
+              </a:rPr>
+              <a:t>Esperar:</a:t>
+            </a:r>
+            <a:r>
+              <a:rPr sz="2800" b="0">
+                <a:solidFill>
+                  <a:srgbClr val="1F2A44"/>
+                </a:solidFill>
+                <a:latin typeface="Nunito Sans"/>
+              </a:rPr>
+              <a:t> no enviar, no contestar, no decidir todavía.</a:t>
+            </a:r>
+          </a:p>
+          <a:p>
+            <a:pPr>
+              <a:spcAft>
+                <a:spcPts val="1260"/>
+              </a:spcAft>
+            </a:pPr>
+            <a:r>
+              <a:rPr sz="2800" b="1">
+                <a:solidFill>
+                  <a:srgbClr val="E8793A"/>
+                </a:solidFill>
+                <a:latin typeface="Nunito Sans"/>
+              </a:rPr>
+              <a:t>• </a:t>
+            </a:r>
+            <a:r>
+              <a:rPr sz="2800" b="1">
+                <a:solidFill>
+                  <a:srgbClr val="1F2A44"/>
+                </a:solidFill>
+                <a:latin typeface="Nunito Sans"/>
+              </a:rPr>
+              <a:t>Preguntar:</a:t>
+            </a:r>
+            <a:r>
+              <a:rPr sz="2800" b="0">
+                <a:solidFill>
+                  <a:srgbClr val="1F2A44"/>
+                </a:solidFill>
+                <a:latin typeface="Nunito Sans"/>
+              </a:rPr>
+              <a:t> ¿qué idea me hago? ¿Cómo lo sé? ¿Hay otra explicación?</a:t>
             </a:r>
           </a:p>
         </p:txBody>
@@ -5200,8 +5121,8 @@
         </p:nvSpPr>
         <p:spPr>
           <a:xfrm>
-            <a:off x="640000" y="1300000"/>
-            <a:ext cx="10912000" cy="4800000"/>
+            <a:off x="640000" y="760000"/>
+            <a:ext cx="10912000" cy="800000"/>
           </a:xfrm>
           <a:prstGeom prst="rect">
             <a:avLst/>
@@ -5216,76 +5137,56 @@
           <a:p>
             <a:pPr>
               <a:spcAft>
-                <a:spcPts val="1350"/>
+                <a:spcPts val="1710"/>
               </a:spcAft>
             </a:pPr>
             <a:r>
-              <a:rPr sz="3000" b="1">
-                <a:solidFill>
-                  <a:srgbClr val="E8793A"/>
-                </a:solidFill>
-                <a:latin typeface="Nunito Sans"/>
-              </a:rPr>
-              <a:t>1. </a:t>
-            </a:r>
-            <a:r>
-              <a:rPr sz="3000" b="0">
+              <a:rPr sz="3800" b="1">
                 <a:solidFill>
                   <a:srgbClr val="1F2A44"/>
                 </a:solidFill>
-                <a:latin typeface="Nunito Sans"/>
-              </a:rPr>
-              <a:t>Un gráfico puede engañar aunque los números sean verdad.</a:t>
-            </a:r>
-          </a:p>
+                <a:latin typeface="Fredoka"/>
+              </a:rPr>
+              <a:t>Escríbelo tú primero, sin mirar</a:t>
+            </a:r>
+          </a:p>
+        </p:txBody>
+      </p:sp>
+      <p:sp>
+        <p:nvSpPr>
+          <p:cNvPr id="4" name="TextBox 3"/>
+          <p:cNvSpPr txBox="1"/>
+          <p:nvPr/>
+        </p:nvSpPr>
+        <p:spPr>
+          <a:xfrm>
+            <a:off x="640000" y="1800000"/>
+            <a:ext cx="10912000" cy="1500000"/>
+          </a:xfrm>
+          <a:prstGeom prst="rect">
+            <a:avLst/>
+          </a:prstGeom>
+          <a:noFill/>
+        </p:spPr>
+        <p:txBody>
+          <a:bodyPr wrap="square">
+            <a:spAutoFit/>
+          </a:bodyPr>
+          <a:lstStyle/>
           <a:p>
             <a:pPr>
               <a:spcAft>
-                <a:spcPts val="1350"/>
+                <a:spcPts val="1170"/>
               </a:spcAft>
             </a:pPr>
             <a:r>
-              <a:rPr sz="3000" b="1">
-                <a:solidFill>
-                  <a:srgbClr val="E8793A"/>
-                </a:solidFill>
-                <a:latin typeface="Nunito Sans"/>
-              </a:rPr>
-              <a:t>2. </a:t>
-            </a:r>
-            <a:r>
-              <a:rPr sz="3000" b="0">
-                <a:solidFill>
-                  <a:srgbClr val="1F2A44"/>
-                </a:solidFill>
-                <a:latin typeface="Nunito Sans"/>
-              </a:rPr>
-              <a:t>Mira dónde empieza el eje, qué fechas faltan y qué emoción buscan los colores.</a:t>
-            </a:r>
-          </a:p>
-          <a:p>
-            <a:pPr>
-              <a:spcAft>
-                <a:spcPts val="1350"/>
-              </a:spcAft>
-            </a:pPr>
-            <a:r>
-              <a:rPr sz="3000" b="1">
-                <a:solidFill>
-                  <a:srgbClr val="E8793A"/>
-                </a:solidFill>
-                <a:latin typeface="Nunito Sans"/>
-              </a:rPr>
-              <a:t>3. </a:t>
-            </a:r>
-            <a:r>
-              <a:rPr sz="3000" b="0">
-                <a:solidFill>
-                  <a:srgbClr val="1F2A44"/>
-                </a:solidFill>
-                <a:latin typeface="Nunito Sans"/>
-              </a:rPr>
-              <a:t>Un eje cortado exagera las barras, pero en temperaturas puede estar bien.</a:t>
+              <a:rPr sz="2600" b="0">
+                <a:solidFill>
+                  <a:srgbClr val="4A5568"/>
+                </a:solidFill>
+                <a:latin typeface="Nunito Sans"/>
+              </a:rPr>
+              <a:t>Dos minutos. Después lo comparamos.</a:t>
             </a:r>
           </a:p>
         </p:txBody>
@@ -5304,7 +5205,7 @@
     <p:bg>
       <p:bgPr>
         <a:solidFill>
-          <a:srgbClr val="1F2A44"/>
+          <a:srgbClr val="FBF7EF"/>
         </a:solidFill>
         <a:effectLst/>
       </p:bgPr>
@@ -5346,11 +5247,11 @@
             <a:r>
               <a:rPr sz="1400" b="1">
                 <a:solidFill>
-                  <a:srgbClr val="F4B183"/>
-                </a:solidFill>
-                <a:latin typeface="Nunito Sans"/>
-              </a:rPr>
-              <a:t>VÍDEO</a:t>
+                  <a:srgbClr val="E8793A"/>
+                </a:solidFill>
+                <a:latin typeface="Nunito Sans"/>
+              </a:rPr>
+              <a:t>LO DE HOY EN TRES LÍNEAS</a:t>
             </a:r>
           </a:p>
         </p:txBody>
@@ -5363,8 +5264,8 @@
         </p:nvSpPr>
         <p:spPr>
           <a:xfrm>
-            <a:off x="640000" y="760000"/>
-            <a:ext cx="10912000" cy="800000"/>
+            <a:off x="640000" y="1300000"/>
+            <a:ext cx="10912000" cy="4800000"/>
           </a:xfrm>
           <a:prstGeom prst="rect">
             <a:avLst/>
@@ -5379,56 +5280,76 @@
           <a:p>
             <a:pPr>
               <a:spcAft>
-                <a:spcPts val="1620"/>
+                <a:spcPts val="1350"/>
               </a:spcAft>
             </a:pPr>
             <a:r>
-              <a:rPr sz="3600" b="1">
-                <a:solidFill>
-                  <a:srgbClr val="FBF7EF"/>
-                </a:solidFill>
-                <a:latin typeface="Fredoka"/>
-              </a:rPr>
-              <a:t>Gráficos engañosos: ejes cortados y escalas</a:t>
-            </a:r>
-          </a:p>
-        </p:txBody>
-      </p:sp>
-      <p:sp>
-        <p:nvSpPr>
-          <p:cNvPr id="4" name="TextBox 3"/>
-          <p:cNvSpPr txBox="1"/>
-          <p:nvPr/>
-        </p:nvSpPr>
-        <p:spPr>
-          <a:xfrm>
-            <a:off x="640000" y="2200000"/>
-            <a:ext cx="10912000" cy="2000000"/>
-          </a:xfrm>
-          <a:prstGeom prst="rect">
-            <a:avLst/>
-          </a:prstGeom>
-          <a:noFill/>
-        </p:spPr>
-        <p:txBody>
-          <a:bodyPr wrap="square">
-            <a:spAutoFit/>
-          </a:bodyPr>
-          <a:lstStyle/>
+              <a:rPr sz="3000" b="1">
+                <a:solidFill>
+                  <a:srgbClr val="E8793A"/>
+                </a:solidFill>
+                <a:latin typeface="Nunito Sans"/>
+              </a:rPr>
+              <a:t>1. </a:t>
+            </a:r>
+            <a:r>
+              <a:rPr sz="3000" b="0">
+                <a:solidFill>
+                  <a:srgbClr val="1F2A44"/>
+                </a:solidFill>
+                <a:latin typeface="Nunito Sans"/>
+              </a:rPr>
+              <a:t>Una emoción es una reacción rápida ante algo que nos importa; un sentimiento dura más.</a:t>
+            </a:r>
+          </a:p>
           <a:p>
             <a:pPr>
               <a:spcAft>
-                <a:spcPts val="1080"/>
+                <a:spcPts val="1350"/>
               </a:spcAft>
             </a:pPr>
             <a:r>
-              <a:rPr sz="2400" b="0">
-                <a:solidFill>
-                  <a:srgbClr val="C9D3E6"/>
-                </a:solidFill>
-                <a:latin typeface="Nunito Sans"/>
-              </a:rPr>
-              <a:t>Ver gráficos reales de noticias y anuncios con el eje cortado o las fechas recortadas.</a:t>
+              <a:rPr sz="3000" b="1">
+                <a:solidFill>
+                  <a:srgbClr val="E8793A"/>
+                </a:solidFill>
+                <a:latin typeface="Nunito Sans"/>
+              </a:rPr>
+              <a:t>2. </a:t>
+            </a:r>
+            <a:r>
+              <a:rPr sz="3000" b="0">
+                <a:solidFill>
+                  <a:srgbClr val="1F2A44"/>
+                </a:solidFill>
+                <a:latin typeface="Nunito Sans"/>
+              </a:rPr>
+              <a:t>Las emociones no son buenas ni malas: informan, pero pueden equivocarse.</a:t>
+            </a:r>
+          </a:p>
+          <a:p>
+            <a:pPr>
+              <a:spcAft>
+                <a:spcPts val="1350"/>
+              </a:spcAft>
+            </a:pPr>
+            <a:r>
+              <a:rPr sz="3000" b="1">
+                <a:solidFill>
+                  <a:srgbClr val="E8793A"/>
+                </a:solidFill>
+                <a:latin typeface="Nunito Sans"/>
+              </a:rPr>
+              <a:t>3. </a:t>
+            </a:r>
+            <a:r>
+              <a:rPr sz="3000" b="0">
+                <a:solidFill>
+                  <a:srgbClr val="1F2A44"/>
+                </a:solidFill>
+                <a:latin typeface="Nunito Sans"/>
+              </a:rPr>
+              <a:t>La emoción no se elige; lo que hacemos con ella, sí. En caliente, mejor esperar.</a:t>
             </a:r>
           </a:p>
         </p:txBody>
@@ -5493,6 +5414,149 @@
                 </a:solidFill>
                 <a:latin typeface="Nunito Sans"/>
               </a:rPr>
+              <a:t>VÍDEO</a:t>
+            </a:r>
+          </a:p>
+        </p:txBody>
+      </p:sp>
+      <p:sp>
+        <p:nvSpPr>
+          <p:cNvPr id="3" name="TextBox 2"/>
+          <p:cNvSpPr txBox="1"/>
+          <p:nvPr/>
+        </p:nvSpPr>
+        <p:spPr>
+          <a:xfrm>
+            <a:off x="640000" y="760000"/>
+            <a:ext cx="10912000" cy="800000"/>
+          </a:xfrm>
+          <a:prstGeom prst="rect">
+            <a:avLst/>
+          </a:prstGeom>
+          <a:noFill/>
+        </p:spPr>
+        <p:txBody>
+          <a:bodyPr wrap="square">
+            <a:spAutoFit/>
+          </a:bodyPr>
+          <a:lstStyle/>
+          <a:p>
+            <a:pPr>
+              <a:spcAft>
+                <a:spcPts val="1620"/>
+              </a:spcAft>
+            </a:pPr>
+            <a:r>
+              <a:rPr sz="3600" b="1">
+                <a:solidFill>
+                  <a:srgbClr val="FBF7EF"/>
+                </a:solidFill>
+                <a:latin typeface="Fredoka"/>
+              </a:rPr>
+              <a:t>Para qué sirven las emociones básicas (miedo, enfado, tristeza, alegría)</a:t>
+            </a:r>
+          </a:p>
+        </p:txBody>
+      </p:sp>
+      <p:sp>
+        <p:nvSpPr>
+          <p:cNvPr id="4" name="TextBox 3"/>
+          <p:cNvSpPr txBox="1"/>
+          <p:nvPr/>
+        </p:nvSpPr>
+        <p:spPr>
+          <a:xfrm>
+            <a:off x="640000" y="2200000"/>
+            <a:ext cx="10912000" cy="2000000"/>
+          </a:xfrm>
+          <a:prstGeom prst="rect">
+            <a:avLst/>
+          </a:prstGeom>
+          <a:noFill/>
+        </p:spPr>
+        <p:txBody>
+          <a:bodyPr wrap="square">
+            <a:spAutoFit/>
+          </a:bodyPr>
+          <a:lstStyle/>
+          <a:p>
+            <a:pPr>
+              <a:spcAft>
+                <a:spcPts val="1080"/>
+              </a:spcAft>
+            </a:pPr>
+            <a:r>
+              <a:rPr sz="2400" b="0">
+                <a:solidFill>
+                  <a:srgbClr val="C9D3E6"/>
+                </a:solidFill>
+                <a:latin typeface="Nunito Sans"/>
+              </a:rPr>
+              <a:t>Que vean con otros ejemplos que cada emoción es un aviso útil, no un fallo.</a:t>
+            </a:r>
+          </a:p>
+        </p:txBody>
+      </p:sp>
+    </p:spTree>
+  </p:cSld>
+  <p:clrMapOvr>
+    <a:masterClrMapping/>
+  </p:clrMapOvr>
+</p:sld>
+</file>
+
+<file path=ppt/slides/slide19.xml><?xml version="1.0" encoding="utf-8"?>
+<p:sld xmlns:a="http://schemas.openxmlformats.org/drawingml/2006/main" xmlns:p="http://schemas.openxmlformats.org/presentationml/2006/main" xmlns:r="http://schemas.openxmlformats.org/officeDocument/2006/relationships">
+  <p:cSld>
+    <p:bg>
+      <p:bgPr>
+        <a:solidFill>
+          <a:srgbClr val="1F2A44"/>
+        </a:solidFill>
+        <a:effectLst/>
+      </p:bgPr>
+    </p:bg>
+    <p:spTree>
+      <p:nvGrpSpPr>
+        <p:cNvPr id="1" name=""/>
+        <p:cNvGrpSpPr/>
+        <p:nvPr/>
+      </p:nvGrpSpPr>
+      <p:grpSpPr/>
+      <p:sp>
+        <p:nvSpPr>
+          <p:cNvPr id="2" name="TextBox 1"/>
+          <p:cNvSpPr txBox="1"/>
+          <p:nvPr/>
+        </p:nvSpPr>
+        <p:spPr>
+          <a:xfrm>
+            <a:off x="640000" y="380000"/>
+            <a:ext cx="10912000" cy="420000"/>
+          </a:xfrm>
+          <a:prstGeom prst="rect">
+            <a:avLst/>
+          </a:prstGeom>
+          <a:noFill/>
+        </p:spPr>
+        <p:txBody>
+          <a:bodyPr wrap="square">
+            <a:spAutoFit/>
+          </a:bodyPr>
+          <a:lstStyle/>
+          <a:p>
+            <a:pPr>
+              <a:spcAft>
+                <a:spcPts val="630"/>
+              </a:spcAft>
+            </a:pPr>
+            <a:r>
+              <a:rPr sz="1400" b="1">
+                <a:solidFill>
+                  <a:srgbClr val="F4B183"/>
+                </a:solidFill>
+                <a:latin typeface="Nunito Sans"/>
+              </a:rPr>
               <a:t>AHORA, LA HOJA DEL DÍA</a:t>
             </a:r>
           </a:p>
@@ -6086,7 +6150,7 @@
                 </a:solidFill>
                 <a:latin typeface="Nunito Sans"/>
               </a:rPr>
-              <a:t>Ante un porcentaje que asusta, pregunto: «¿de ______?».  (sesión 37)</a:t>
+              <a:t>Un ______ es una mentira inventada que se hace pasar por noticia.  (sesión 37)</a:t>
             </a:r>
           </a:p>
           <a:p>
@@ -6111,7 +6175,7 @@
                 </a:solidFill>
                 <a:latin typeface="Nunito Sans"/>
               </a:rPr>
-              <a:t>Pasar del 40 % al 50 % es subir 10 ______, pero es subir un 25 %.  (sesión 37)</a:t>
+              <a:t>Un ______ es un vídeo, audio o imagen falso hecho con inteligencia artificial.  (sesión 37)</a:t>
             </a:r>
           </a:p>
           <a:p>
@@ -6136,7 +6200,7 @@
                 </a:solidFill>
                 <a:latin typeface="Nunito Sans"/>
               </a:rPr>
-              <a:t>Compartimos bulos porque nos ______ y porque lo manda alguien de confianza.  (sesión 33)</a:t>
+              <a:t>Palabras que suelen usar los titulares clickbait: «increíble», «brutal», «______».  (sesión 33)</a:t>
             </a:r>
           </a:p>
         </p:txBody>
@@ -6288,7 +6352,7 @@
                 </a:solidFill>
                 <a:latin typeface="Nunito Sans"/>
               </a:rPr>
-              <a:t>Ante un porcentaje que asusta, pregunto: «¿de </a:t>
+              <a:t>Un </a:t>
             </a:r>
             <a:r>
               <a:rPr sz="2600" b="1">
@@ -6297,7 +6361,7 @@
                 </a:solidFill>
                 <a:latin typeface="Nunito Sans"/>
               </a:rPr>
-              <a:t>cuántos</a:t>
+              <a:t>bulo</a:t>
             </a:r>
             <a:r>
               <a:rPr sz="2600" b="0">
@@ -6306,7 +6370,7 @@
                 </a:solidFill>
                 <a:latin typeface="Nunito Sans"/>
               </a:rPr>
-              <a:t>?».  (sesión 37)</a:t>
+              <a:t> es una mentira inventada que se hace pasar por noticia.  (sesión 37)</a:t>
             </a:r>
           </a:p>
           <a:p>
@@ -6331,7 +6395,7 @@
                 </a:solidFill>
                 <a:latin typeface="Nunito Sans"/>
               </a:rPr>
-              <a:t>Pasar del 40 % al 50 % es subir 10 </a:t>
+              <a:t>Un </a:t>
             </a:r>
             <a:r>
               <a:rPr sz="2600" b="1">
@@ -6340,7 +6404,7 @@
                 </a:solidFill>
                 <a:latin typeface="Nunito Sans"/>
               </a:rPr>
-              <a:t>puntos</a:t>
+              <a:t>deepfake</a:t>
             </a:r>
             <a:r>
               <a:rPr sz="2600" b="0">
@@ -6349,7 +6413,7 @@
                 </a:solidFill>
                 <a:latin typeface="Nunito Sans"/>
               </a:rPr>
-              <a:t>, pero es subir un 25 %.  (sesión 37)</a:t>
+              <a:t> es un vídeo, audio o imagen falso hecho con inteligencia artificial.  (sesión 37)</a:t>
             </a:r>
           </a:p>
           <a:p>
@@ -6374,7 +6438,7 @@
                 </a:solidFill>
                 <a:latin typeface="Nunito Sans"/>
               </a:rPr>
-              <a:t>Compartimos bulos porque nos </a:t>
+              <a:t>Palabras que suelen usar los titulares clickbait: «increíble», «brutal», «</a:t>
             </a:r>
             <a:r>
               <a:rPr sz="2600" b="1">
@@ -6383,7 +6447,7 @@
                 </a:solidFill>
                 <a:latin typeface="Nunito Sans"/>
               </a:rPr>
-              <a:t>emocionan</a:t>
+              <a:t>impactante</a:t>
             </a:r>
             <a:r>
               <a:rPr sz="2600" b="0">
@@ -6392,7 +6456,7 @@
                 </a:solidFill>
                 <a:latin typeface="Nunito Sans"/>
               </a:rPr>
-              <a:t> y porque lo manda alguien de confianza.  (sesión 33)</a:t>
+              <a:t>».  (sesión 33)</a:t>
             </a:r>
           </a:p>
         </p:txBody>
@@ -6539,7 +6603,7 @@
                 </a:solidFill>
                 <a:latin typeface="Nunito Sans"/>
               </a:rPr>
-              <a:t>Dos gráficos muestran las mismas ventas. En uno parece que se disparan. En el otro, que casi no cambian.</a:t>
+              <a:t>Una chica ve que una amiga ha leído su mensaje hace una hora y no contesta. Se enfada. Escribe «Pues vale, pasa de mí» y lo envía.</a:t>
             </a:r>
           </a:p>
         </p:txBody>
@@ -6578,7 +6642,7 @@
                 </a:solidFill>
                 <a:latin typeface="Nunito Sans"/>
               </a:rPr>
-              <a:t>¿Cómo puede ser, si los números son iguales?</a:t>
+              <a:t>¿Qué ha sentido esa chica? ¿Tenía razones para sentirlo?</a:t>
             </a:r>
           </a:p>
         </p:txBody>
@@ -6682,7 +6746,7 @@
                 </a:solidFill>
                 <a:latin typeface="Fredoka"/>
               </a:rPr>
-              <a:t>Los trucos de los gráficos</a:t>
+              <a:t>Emoción, sentimiento e idea</a:t>
             </a:r>
           </a:p>
         </p:txBody>
@@ -6747,7 +6811,7 @@
                 </a:solidFill>
                 <a:latin typeface="Nunito Sans"/>
               </a:rPr>
-              <a:t>BLOQUE 1 · LOS TRUCOS DE LOS GRÁFICOS</a:t>
+              <a:t>BLOQUE 1 · EMOCIÓN, SENTIMIENTO E IDEA</a:t>
             </a:r>
           </a:p>
         </p:txBody>
@@ -6786,7 +6850,7 @@
                 </a:solidFill>
                 <a:latin typeface="Fredoka"/>
               </a:rPr>
-              <a:t>El eje</a:t>
+              <a:t>Emoción</a:t>
             </a:r>
           </a:p>
         </p:txBody>
@@ -6868,7 +6932,7 @@
                 </a:solidFill>
                 <a:latin typeface="Nunito Sans"/>
               </a:rPr>
-              <a:t>El eje vertical marca los valores del gráfico. En un gráfico de barras, lo normal es que empiece en 0.</a:t>
+              <a:t>Es una reacción rápida del cuerpo y de la mente ante algo que nos importa.</a:t>
             </a:r>
           </a:p>
         </p:txBody>
@@ -6910,13 +6974,22 @@
               <a:t>• </a:t>
             </a:r>
             <a:r>
+              <a:rPr sz="2800" b="0">
+                <a:solidFill>
+                  <a:srgbClr val="1F2A44"/>
+                </a:solidFill>
+                <a:latin typeface="Nunito Sans"/>
+              </a:rPr>
+              <a:t>Aparece </a:t>
+            </a:r>
+            <a:r>
               <a:rPr sz="2800" b="1">
                 <a:solidFill>
                   <a:srgbClr val="1F2A44"/>
                 </a:solidFill>
                 <a:latin typeface="Nunito Sans"/>
               </a:rPr>
-              <a:t>Eje cortado:</a:t>
+              <a:t>sola</a:t>
             </a:r>
             <a:r>
               <a:rPr sz="2800" b="0">
@@ -6925,7 +6998,7 @@
                 </a:solidFill>
                 <a:latin typeface="Nunito Sans"/>
               </a:rPr>
-              <a:t> empieza en otro número, por ejemplo en 90</a:t>
+              <a:t>: no la elegimos</a:t>
             </a:r>
           </a:p>
           <a:p>
@@ -6950,7 +7023,25 @@
                 </a:solidFill>
                 <a:latin typeface="Nunito Sans"/>
               </a:rPr>
-              <a:t>Así, en las barras, diferencias pequeñas parecen enormes</a:t>
+              <a:t>Dura </a:t>
+            </a:r>
+            <a:r>
+              <a:rPr sz="2800" b="1">
+                <a:solidFill>
+                  <a:srgbClr val="1F2A44"/>
+                </a:solidFill>
+                <a:latin typeface="Nunito Sans"/>
+              </a:rPr>
+              <a:t>poco</a:t>
+            </a:r>
+            <a:r>
+              <a:rPr sz="2800" b="0">
+                <a:solidFill>
+                  <a:srgbClr val="1F2A44"/>
+                </a:solidFill>
+                <a:latin typeface="Nunito Sans"/>
+              </a:rPr>
+              <a:t>: segundos o minutos</a:t>
             </a:r>
           </a:p>
           <a:p>
@@ -6975,7 +7066,25 @@
                 </a:solidFill>
                 <a:latin typeface="Nunito Sans"/>
               </a:rPr>
-              <a:t>Mira siempre dónde empieza el eje</a:t>
+              <a:t>Se nota en el </a:t>
+            </a:r>
+            <a:r>
+              <a:rPr sz="2800" b="1">
+                <a:solidFill>
+                  <a:srgbClr val="1F2A44"/>
+                </a:solidFill>
+                <a:latin typeface="Nunito Sans"/>
+              </a:rPr>
+              <a:t>cuerpo</a:t>
+            </a:r>
+            <a:r>
+              <a:rPr sz="2800" b="0">
+                <a:solidFill>
+                  <a:srgbClr val="1F2A44"/>
+                </a:solidFill>
+                <a:latin typeface="Nunito Sans"/>
+              </a:rPr>
+              <a:t>: corazón, cara, estómago</a:t>
             </a:r>
           </a:p>
         </p:txBody>
@@ -7040,7 +7149,7 @@
                 </a:solidFill>
                 <a:latin typeface="Nunito Sans"/>
               </a:rPr>
-              <a:t>BLOQUE 1 · LOS TRUCOS DE LOS GRÁFICOS</a:t>
+              <a:t>BLOQUE 1 · EMOCIÓN, SENTIMIENTO E IDEA</a:t>
             </a:r>
           </a:p>
         </p:txBody>
@@ -7079,7 +7188,7 @@
                 </a:solidFill>
                 <a:latin typeface="Fredoka"/>
               </a:rPr>
-              <a:t>Mismos puntos, eje distinto (ejemplo inventado)</a:t>
+              <a:t>Tres cosas que solemos mezclar</a:t>
             </a:r>
           </a:p>
         </p:txBody>
@@ -7120,7 +7229,7 @@
                           </a:solidFill>
                           <a:latin typeface="Fredoka"/>
                         </a:rPr>
-                        <a:t>Puntos en un videojuego</a:t>
+                        <a:t/>
                       </a:r>
                     </a:p>
                   </a:txBody>
@@ -7142,7 +7251,7 @@
                           </a:solidFill>
                           <a:latin typeface="Fredoka"/>
                         </a:rPr>
-                        <a:t>Eje de 0 a 100</a:t>
+                        <a:t>Qué es</a:t>
                       </a:r>
                     </a:p>
                   </a:txBody>
@@ -7164,7 +7273,7 @@
                           </a:solidFill>
                           <a:latin typeface="Fredoka"/>
                         </a:rPr>
-                        <a:t>Eje de 90 a 100</a:t>
+                        <a:t>Ejemplo: la nota de Mates</a:t>
                       </a:r>
                     </a:p>
                   </a:txBody>
@@ -7182,13 +7291,13 @@
                     <a:lstStyle/>
                     <a:p>
                       <a:r>
-                        <a:rPr sz="2000" b="0">
+                        <a:rPr sz="2000" b="1">
                           <a:solidFill>
                             <a:srgbClr val="1F2A44"/>
                           </a:solidFill>
                           <a:latin typeface="Nunito Sans"/>
                         </a:rPr>
-                        <a:t>Una chica: 92 puntos</a:t>
+                        <a:t>Emoción</a:t>
                       </a:r>
                     </a:p>
                   </a:txBody>
@@ -7210,7 +7319,7 @@
                           </a:solidFill>
                           <a:latin typeface="Nunito Sans"/>
                         </a:rPr>
-                        <a:t>Barra llena al 92 %</a:t>
+                        <a:t>Reacción rápida que dura poco</a:t>
                       </a:r>
                     </a:p>
                   </a:txBody>
@@ -7232,7 +7341,7 @@
                           </a:solidFill>
                           <a:latin typeface="Nunito Sans"/>
                         </a:rPr>
-                        <a:t>Barra llena al 20 %</a:t>
+                        <a:t>Se me encoge el estómago al ver un 3</a:t>
                       </a:r>
                     </a:p>
                   </a:txBody>
@@ -7250,13 +7359,13 @@
                     <a:lstStyle/>
                     <a:p>
                       <a:r>
-                        <a:rPr sz="2000" b="0">
+                        <a:rPr sz="2000" b="1">
                           <a:solidFill>
                             <a:srgbClr val="1F2A44"/>
                           </a:solidFill>
                           <a:latin typeface="Nunito Sans"/>
                         </a:rPr>
-                        <a:t>Un chico: 98 puntos</a:t>
+                        <a:t>Sentimiento</a:t>
                       </a:r>
                     </a:p>
                   </a:txBody>
@@ -7278,7 +7387,7 @@
                           </a:solidFill>
                           <a:latin typeface="Nunito Sans"/>
                         </a:rPr>
-                        <a:t>Barra llena al 98 %</a:t>
+                        <a:t>Emoción que dura y en la que pienso</a:t>
                       </a:r>
                     </a:p>
                   </a:txBody>
@@ -7300,7 +7409,7 @@
                           </a:solidFill>
                           <a:latin typeface="Nunito Sans"/>
                         </a:rPr>
-                        <a:t>Barra llena al 80 %</a:t>
+                        <a:t>Llevo toda la semana preocupada</a:t>
                       </a:r>
                     </a:p>
                   </a:txBody>
@@ -7318,13 +7427,13 @@
                     <a:lstStyle/>
                     <a:p>
                       <a:r>
-                        <a:rPr sz="2000" b="0">
+                        <a:rPr sz="2000" b="1">
                           <a:solidFill>
                             <a:srgbClr val="1F2A44"/>
                           </a:solidFill>
                           <a:latin typeface="Nunito Sans"/>
                         </a:rPr>
-                        <a:t>¿Qué parece?</a:t>
+                        <a:t>Idea</a:t>
                       </a:r>
                     </a:p>
                   </a:txBody>
@@ -7346,7 +7455,7 @@
                           </a:solidFill>
                           <a:latin typeface="Nunito Sans"/>
                         </a:rPr>
-                        <a:t>Casi iguales</a:t>
+                        <a:t>Lo que pienso de lo que pasa</a:t>
                       </a:r>
                     </a:p>
                   </a:txBody>
@@ -7368,7 +7477,7 @@
                           </a:solidFill>
                           <a:latin typeface="Nunito Sans"/>
                         </a:rPr>
-                        <a:t>¡El chico tiene cuatro veces más!</a:t>
+                        <a:t>«Voy a suspender el curso entero»</a:t>
                       </a:r>
                     </a:p>
                   </a:txBody>
@@ -7443,7 +7552,7 @@
                 </a:solidFill>
                 <a:latin typeface="Nunito Sans"/>
               </a:rPr>
-              <a:t>BLOQUE 1 · LOS TRUCOS DE LOS GRÁFICOS</a:t>
+              <a:t>BLOQUE 1 · EMOCIÓN, SENTIMIENTO E IDEA</a:t>
             </a:r>
           </a:p>
         </p:txBody>
@@ -7482,170 +7591,378 @@
                 </a:solidFill>
                 <a:latin typeface="Fredoka"/>
               </a:rPr>
-              <a:t>Otros trucos</a:t>
-            </a:r>
-          </a:p>
-        </p:txBody>
-      </p:sp>
-      <p:sp>
-        <p:nvSpPr>
-          <p:cNvPr id="4" name="TextBox 3"/>
-          <p:cNvSpPr txBox="1"/>
+              <a:t>Cada emoción es un aviso</a:t>
+            </a:r>
+          </a:p>
+        </p:txBody>
+      </p:sp>
+      <p:graphicFrame>
+        <p:nvGraphicFramePr>
+          <p:cNvPr id="4" name="Table 3"/>
+          <p:cNvGraphicFramePr>
+            <a:graphicFrameLocks noGrp="1"/>
+          </p:cNvGraphicFramePr>
           <p:nvPr/>
-        </p:nvSpPr>
-        <p:spPr>
-          <a:xfrm>
-            <a:off x="640000" y="1650000"/>
-            <a:ext cx="10912000" cy="4808000"/>
-          </a:xfrm>
-          <a:prstGeom prst="rect">
-            <a:avLst/>
-          </a:prstGeom>
-          <a:noFill/>
-        </p:spPr>
-        <p:txBody>
-          <a:bodyPr wrap="square">
-            <a:spAutoFit/>
-          </a:bodyPr>
-          <a:lstStyle/>
-          <a:p>
-            <a:pPr>
-              <a:spcAft>
-                <a:spcPts val="1260"/>
-              </a:spcAft>
-            </a:pPr>
-            <a:r>
-              <a:rPr sz="2800" b="1">
-                <a:solidFill>
-                  <a:srgbClr val="E8793A"/>
-                </a:solidFill>
-                <a:latin typeface="Nunito Sans"/>
-              </a:rPr>
-              <a:t>• </a:t>
-            </a:r>
-            <a:r>
-              <a:rPr sz="2800" b="1">
-                <a:solidFill>
-                  <a:srgbClr val="1F2A44"/>
-                </a:solidFill>
-                <a:latin typeface="Nunito Sans"/>
-              </a:rPr>
-              <a:t>Escala estirada o aplastada:</a:t>
-            </a:r>
-            <a:r>
-              <a:rPr sz="2800" b="0">
-                <a:solidFill>
-                  <a:srgbClr val="1F2A44"/>
-                </a:solidFill>
-                <a:latin typeface="Nunito Sans"/>
-              </a:rPr>
-              <a:t> la misma subida parece un muro o una llanura</a:t>
-            </a:r>
-          </a:p>
-          <a:p>
-            <a:pPr>
-              <a:spcAft>
-                <a:spcPts val="1260"/>
-              </a:spcAft>
-            </a:pPr>
-            <a:r>
-              <a:rPr sz="2800" b="1">
-                <a:solidFill>
-                  <a:srgbClr val="E8793A"/>
-                </a:solidFill>
-                <a:latin typeface="Nunito Sans"/>
-              </a:rPr>
-              <a:t>• </a:t>
-            </a:r>
-            <a:r>
-              <a:rPr sz="2800" b="1">
-                <a:solidFill>
-                  <a:srgbClr val="1F2A44"/>
-                </a:solidFill>
-                <a:latin typeface="Nunito Sans"/>
-              </a:rPr>
-              <a:t>Dibujos que crecen en ancho y alto:</a:t>
-            </a:r>
-            <a:r>
-              <a:rPr sz="2800" b="0">
-                <a:solidFill>
-                  <a:srgbClr val="1F2A44"/>
-                </a:solidFill>
-                <a:latin typeface="Nunito Sans"/>
-              </a:rPr>
-              <a:t> el doble parece cuatro veces más</a:t>
-            </a:r>
-          </a:p>
-          <a:p>
-            <a:pPr>
-              <a:spcAft>
-                <a:spcPts val="1260"/>
-              </a:spcAft>
-            </a:pPr>
-            <a:r>
-              <a:rPr sz="2800" b="1">
-                <a:solidFill>
-                  <a:srgbClr val="E8793A"/>
-                </a:solidFill>
-                <a:latin typeface="Nunito Sans"/>
-              </a:rPr>
-              <a:t>• </a:t>
-            </a:r>
-            <a:r>
-              <a:rPr sz="2800" b="1">
-                <a:solidFill>
-                  <a:srgbClr val="1F2A44"/>
-                </a:solidFill>
-                <a:latin typeface="Nunito Sans"/>
-              </a:rPr>
-              <a:t>Colores:</a:t>
-            </a:r>
-            <a:r>
-              <a:rPr sz="2800" b="0">
-                <a:solidFill>
-                  <a:srgbClr val="1F2A44"/>
-                </a:solidFill>
-                <a:latin typeface="Nunito Sans"/>
-              </a:rPr>
-              <a:t> el rojo asusta aunque el dato sea pequeño</a:t>
-            </a:r>
-          </a:p>
-          <a:p>
-            <a:pPr>
-              <a:spcAft>
-                <a:spcPts val="1260"/>
-              </a:spcAft>
-            </a:pPr>
-            <a:r>
-              <a:rPr sz="2800" b="1">
-                <a:solidFill>
-                  <a:srgbClr val="E8793A"/>
-                </a:solidFill>
-                <a:latin typeface="Nunito Sans"/>
-              </a:rPr>
-              <a:t>• </a:t>
-            </a:r>
-            <a:r>
-              <a:rPr sz="2800" b="1">
-                <a:solidFill>
-                  <a:srgbClr val="1F2A44"/>
-                </a:solidFill>
-                <a:latin typeface="Nunito Sans"/>
-              </a:rPr>
-              <a:t>Recortar fechas:</a:t>
-            </a:r>
-            <a:r>
-              <a:rPr sz="2800" b="0">
-                <a:solidFill>
-                  <a:srgbClr val="1F2A44"/>
-                </a:solidFill>
-                <a:latin typeface="Nunito Sans"/>
-              </a:rPr>
-              <a:t> enseñar solo los meses que convienen</a:t>
-            </a:r>
-          </a:p>
-        </p:txBody>
-      </p:sp>
+        </p:nvGraphicFramePr>
+        <p:xfrm>
+          <a:off x="640000" y="1700000"/>
+          <a:ext cx="10912000" cy="3000000"/>
+        </p:xfrm>
+        <a:graphic>
+          <a:graphicData uri="http://schemas.openxmlformats.org/drawingml/2006/table">
+            <a:tbl>
+              <a:tblPr firstRow="1" bandRow="1">
+                <a:tableStyleId>{5C22544A-7EE6-4342-B048-85BDC9FD1C3A}</a:tableStyleId>
+              </a:tblPr>
+              <a:tblGrid>
+                <a:gridCol w="3637333"/>
+                <a:gridCol w="3637333"/>
+                <a:gridCol w="3637334"/>
+              </a:tblGrid>
+              <a:tr h="600000">
+                <a:tc>
+                  <a:txBody>
+                    <a:bodyPr/>
+                    <a:lstStyle/>
+                    <a:p>
+                      <a:r>
+                        <a:rPr sz="2000" b="1">
+                          <a:solidFill>
+                            <a:srgbClr val="FBF7EF"/>
+                          </a:solidFill>
+                          <a:latin typeface="Fredoka"/>
+                        </a:rPr>
+                        <a:t>Emoción</a:t>
+                      </a:r>
+                    </a:p>
+                  </a:txBody>
+                  <a:tcPr>
+                    <a:solidFill>
+                      <a:srgbClr val="1F2A44"/>
+                    </a:solidFill>
+                  </a:tcPr>
+                </a:tc>
+                <a:tc>
+                  <a:txBody>
+                    <a:bodyPr/>
+                    <a:lstStyle/>
+                    <a:p>
+                      <a:r>
+                        <a:rPr sz="2000" b="1">
+                          <a:solidFill>
+                            <a:srgbClr val="FBF7EF"/>
+                          </a:solidFill>
+                          <a:latin typeface="Fredoka"/>
+                        </a:rPr>
+                        <a:t>Me avisa de que…</a:t>
+                      </a:r>
+                    </a:p>
+                  </a:txBody>
+                  <a:tcPr>
+                    <a:solidFill>
+                      <a:srgbClr val="1F2A44"/>
+                    </a:solidFill>
+                  </a:tcPr>
+                </a:tc>
+                <a:tc>
+                  <a:txBody>
+                    <a:bodyPr/>
+                    <a:lstStyle/>
+                    <a:p>
+                      <a:r>
+                        <a:rPr sz="2000" b="1">
+                          <a:solidFill>
+                            <a:srgbClr val="FBF7EF"/>
+                          </a:solidFill>
+                          <a:latin typeface="Fredoka"/>
+                        </a:rPr>
+                        <a:t>Me empuja a…</a:t>
+                      </a:r>
+                    </a:p>
+                  </a:txBody>
+                  <a:tcPr>
+                    <a:solidFill>
+                      <a:srgbClr val="1F2A44"/>
+                    </a:solidFill>
+                  </a:tcPr>
+                </a:tc>
+              </a:tr>
+              <a:tr h="600000">
+                <a:tc>
+                  <a:txBody>
+                    <a:bodyPr/>
+                    <a:lstStyle/>
+                    <a:p>
+                      <a:r>
+                        <a:rPr sz="2000" b="1">
+                          <a:solidFill>
+                            <a:srgbClr val="1F2A44"/>
+                          </a:solidFill>
+                          <a:latin typeface="Nunito Sans"/>
+                        </a:rPr>
+                        <a:t>Miedo</a:t>
+                      </a:r>
+                    </a:p>
+                  </a:txBody>
+                  <a:tcPr>
+                    <a:solidFill>
+                      <a:srgbClr val="FFFFFF"/>
+                    </a:solidFill>
+                  </a:tcPr>
+                </a:tc>
+                <a:tc>
+                  <a:txBody>
+                    <a:bodyPr/>
+                    <a:lstStyle/>
+                    <a:p>
+                      <a:r>
+                        <a:rPr sz="2000" b="0">
+                          <a:solidFill>
+                            <a:srgbClr val="1F2A44"/>
+                          </a:solidFill>
+                          <a:latin typeface="Nunito Sans"/>
+                        </a:rPr>
+                        <a:t>puede haber un peligro</a:t>
+                      </a:r>
+                    </a:p>
+                  </a:txBody>
+                  <a:tcPr>
+                    <a:solidFill>
+                      <a:srgbClr val="FFFFFF"/>
+                    </a:solidFill>
+                  </a:tcPr>
+                </a:tc>
+                <a:tc>
+                  <a:txBody>
+                    <a:bodyPr/>
+                    <a:lstStyle/>
+                    <a:p>
+                      <a:r>
+                        <a:rPr sz="2000" b="0">
+                          <a:solidFill>
+                            <a:srgbClr val="1F2A44"/>
+                          </a:solidFill>
+                          <a:latin typeface="Nunito Sans"/>
+                        </a:rPr>
+                        <a:t>tener cuidado o protegerme</a:t>
+                      </a:r>
+                    </a:p>
+                  </a:txBody>
+                  <a:tcPr>
+                    <a:solidFill>
+                      <a:srgbClr val="FFFFFF"/>
+                    </a:solidFill>
+                  </a:tcPr>
+                </a:tc>
+              </a:tr>
+              <a:tr h="600000">
+                <a:tc>
+                  <a:txBody>
+                    <a:bodyPr/>
+                    <a:lstStyle/>
+                    <a:p>
+                      <a:r>
+                        <a:rPr sz="2000" b="1">
+                          <a:solidFill>
+                            <a:srgbClr val="1F2A44"/>
+                          </a:solidFill>
+                          <a:latin typeface="Nunito Sans"/>
+                        </a:rPr>
+                        <a:t>Enfado</a:t>
+                      </a:r>
+                    </a:p>
+                  </a:txBody>
+                  <a:tcPr>
+                    <a:solidFill>
+                      <a:srgbClr val="EAF0F7"/>
+                    </a:solidFill>
+                  </a:tcPr>
+                </a:tc>
+                <a:tc>
+                  <a:txBody>
+                    <a:bodyPr/>
+                    <a:lstStyle/>
+                    <a:p>
+                      <a:r>
+                        <a:rPr sz="2000" b="0">
+                          <a:solidFill>
+                            <a:srgbClr val="1F2A44"/>
+                          </a:solidFill>
+                          <a:latin typeface="Nunito Sans"/>
+                        </a:rPr>
+                        <a:t>algo me parece injusto o me bloquea</a:t>
+                      </a:r>
+                    </a:p>
+                  </a:txBody>
+                  <a:tcPr>
+                    <a:solidFill>
+                      <a:srgbClr val="EAF0F7"/>
+                    </a:solidFill>
+                  </a:tcPr>
+                </a:tc>
+                <a:tc>
+                  <a:txBody>
+                    <a:bodyPr/>
+                    <a:lstStyle/>
+                    <a:p>
+                      <a:r>
+                        <a:rPr sz="2000" b="0">
+                          <a:solidFill>
+                            <a:srgbClr val="1F2A44"/>
+                          </a:solidFill>
+                          <a:latin typeface="Nunito Sans"/>
+                        </a:rPr>
+                        <a:t>defenderme y poner límites</a:t>
+                      </a:r>
+                    </a:p>
+                  </a:txBody>
+                  <a:tcPr>
+                    <a:solidFill>
+                      <a:srgbClr val="EAF0F7"/>
+                    </a:solidFill>
+                  </a:tcPr>
+                </a:tc>
+              </a:tr>
+              <a:tr h="600000">
+                <a:tc>
+                  <a:txBody>
+                    <a:bodyPr/>
+                    <a:lstStyle/>
+                    <a:p>
+                      <a:r>
+                        <a:rPr sz="2000" b="1">
+                          <a:solidFill>
+                            <a:srgbClr val="1F2A44"/>
+                          </a:solidFill>
+                          <a:latin typeface="Nunito Sans"/>
+                        </a:rPr>
+                        <a:t>Tristeza</a:t>
+                      </a:r>
+                    </a:p>
+                  </a:txBody>
+                  <a:tcPr>
+                    <a:solidFill>
+                      <a:srgbClr val="FFFFFF"/>
+                    </a:solidFill>
+                  </a:tcPr>
+                </a:tc>
+                <a:tc>
+                  <a:txBody>
+                    <a:bodyPr/>
+                    <a:lstStyle/>
+                    <a:p>
+                      <a:r>
+                        <a:rPr sz="2000" b="0">
+                          <a:solidFill>
+                            <a:srgbClr val="1F2A44"/>
+                          </a:solidFill>
+                          <a:latin typeface="Nunito Sans"/>
+                        </a:rPr>
+                        <a:t>he perdido algo que me importa</a:t>
+                      </a:r>
+                    </a:p>
+                  </a:txBody>
+                  <a:tcPr>
+                    <a:solidFill>
+                      <a:srgbClr val="FFFFFF"/>
+                    </a:solidFill>
+                  </a:tcPr>
+                </a:tc>
+                <a:tc>
+                  <a:txBody>
+                    <a:bodyPr/>
+                    <a:lstStyle/>
+                    <a:p>
+                      <a:r>
+                        <a:rPr sz="2000" b="0">
+                          <a:solidFill>
+                            <a:srgbClr val="1F2A44"/>
+                          </a:solidFill>
+                          <a:latin typeface="Nunito Sans"/>
+                        </a:rPr>
+                        <a:t>parar y buscar apoyo</a:t>
+                      </a:r>
+                    </a:p>
+                  </a:txBody>
+                  <a:tcPr>
+                    <a:solidFill>
+                      <a:srgbClr val="FFFFFF"/>
+                    </a:solidFill>
+                  </a:tcPr>
+                </a:tc>
+              </a:tr>
+              <a:tr h="600000">
+                <a:tc>
+                  <a:txBody>
+                    <a:bodyPr/>
+                    <a:lstStyle/>
+                    <a:p>
+                      <a:r>
+                        <a:rPr sz="2000" b="1">
+                          <a:solidFill>
+                            <a:srgbClr val="1F2A44"/>
+                          </a:solidFill>
+                          <a:latin typeface="Nunito Sans"/>
+                        </a:rPr>
+                        <a:t>Alegría</a:t>
+                      </a:r>
+                    </a:p>
+                  </a:txBody>
+                  <a:tcPr>
+                    <a:solidFill>
+                      <a:srgbClr val="EAF0F7"/>
+                    </a:solidFill>
+                  </a:tcPr>
+                </a:tc>
+                <a:tc>
+                  <a:txBody>
+                    <a:bodyPr/>
+                    <a:lstStyle/>
+                    <a:p>
+                      <a:r>
+                        <a:rPr sz="2000" b="0">
+                          <a:solidFill>
+                            <a:srgbClr val="1F2A44"/>
+                          </a:solidFill>
+                          <a:latin typeface="Nunito Sans"/>
+                        </a:rPr>
+                        <a:t>algo me va bien</a:t>
+                      </a:r>
+                    </a:p>
+                  </a:txBody>
+                  <a:tcPr>
+                    <a:solidFill>
+                      <a:srgbClr val="EAF0F7"/>
+                    </a:solidFill>
+                  </a:tcPr>
+                </a:tc>
+                <a:tc>
+                  <a:txBody>
+                    <a:bodyPr/>
+                    <a:lstStyle/>
+                    <a:p>
+                      <a:r>
+                        <a:rPr sz="2000" b="0">
+                          <a:solidFill>
+                            <a:srgbClr val="1F2A44"/>
+                          </a:solidFill>
+                          <a:latin typeface="Nunito Sans"/>
+                        </a:rPr>
+                        <a:t>repetirlo y acercarme a otros</a:t>
+                      </a:r>
+                    </a:p>
+                  </a:txBody>
+                  <a:tcPr>
+                    <a:solidFill>
+                      <a:srgbClr val="EAF0F7"/>
+                    </a:solidFill>
+                  </a:tcPr>
+                </a:tc>
+              </a:tr>
+            </a:tbl>
+          </a:graphicData>
+        </a:graphic>
+      </p:graphicFrame>
     </p:spTree>
   </p:cSld>
   <p:clrMapOvr>
@@ -7706,7 +8023,7 @@
                 </a:solidFill>
                 <a:latin typeface="Nunito Sans"/>
               </a:rPr>
-              <a:t>BLOQUE 1 · LOS TRUCOS DE LOS GRÁFICOS</a:t>
+              <a:t>BLOQUE 1 · EMOCIÓN, SENTIMIENTO E IDEA</a:t>
             </a:r>
           </a:p>
         </p:txBody>
@@ -7745,21 +8062,64 @@
                 </a:solidFill>
                 <a:latin typeface="Fredoka"/>
               </a:rPr>
-              <a:t>Antes de creerte un gráfico</a:t>
-            </a:r>
-          </a:p>
-        </p:txBody>
-      </p:sp>
-      <p:sp>
-        <p:nvSpPr>
-          <p:cNvPr id="4" name="TextBox 3"/>
+              <a:t>Las emociones informan, no mandan</a:t>
+            </a:r>
+          </a:p>
+        </p:txBody>
+      </p:sp>
+      <p:sp>
+        <p:nvSpPr>
+          <p:cNvPr id="4" name="Rectangle 3"/>
+          <p:cNvSpPr/>
+          <p:nvPr/>
+        </p:nvSpPr>
+        <p:spPr>
+          <a:xfrm>
+            <a:off x="640000" y="1650000"/>
+            <a:ext cx="5306000" cy="4400000"/>
+          </a:xfrm>
+          <a:prstGeom prst="rect">
+            <a:avLst/>
+          </a:prstGeom>
+          <a:solidFill>
+            <a:srgbClr val="FBE3D2"/>
+          </a:solidFill>
+          <a:ln>
+            <a:noFill/>
+          </a:ln>
+        </p:spPr>
+        <p:style>
+          <a:lnRef idx="1">
+            <a:schemeClr val="accent1"/>
+          </a:lnRef>
+          <a:fillRef idx="3">
+            <a:schemeClr val="accent1"/>
+          </a:fillRef>
+          <a:effectRef idx="2">
+            <a:schemeClr val="accent1"/>
+          </a:effectRef>
+          <a:fontRef idx="minor">
+            <a:schemeClr val="lt1"/>
+          </a:fontRef>
+        </p:style>
+        <p:txBody>
+          <a:bodyPr rtlCol="0" anchor="ctr"/>
+          <a:lstStyle/>
+          <a:p>
+            <a:pPr algn="ctr"/>
+          </a:p>
+        </p:txBody>
+      </p:sp>
+      <p:sp>
+        <p:nvSpPr>
+          <p:cNvPr id="5" name="TextBox 4"/>
           <p:cNvSpPr txBox="1"/>
           <p:nvPr/>
         </p:nvSpPr>
         <p:spPr>
           <a:xfrm>
-            <a:off x="640000" y="1650000"/>
-            <a:ext cx="10912000" cy="4808000"/>
+            <a:off x="840000" y="1750000"/>
+            <a:ext cx="4906000" cy="600000"/>
           </a:xfrm>
           <a:prstGeom prst="rect">
             <a:avLst/>
@@ -7780,6 +8140,45 @@
             <a:r>
               <a:rPr sz="2800" b="1">
                 <a:solidFill>
+                  <a:srgbClr val="C2531C"/>
+                </a:solidFill>
+                <a:latin typeface="Nunito Sans"/>
+              </a:rPr>
+              <a:t>No son</a:t>
+            </a:r>
+          </a:p>
+        </p:txBody>
+      </p:sp>
+      <p:sp>
+        <p:nvSpPr>
+          <p:cNvPr id="6" name="TextBox 5"/>
+          <p:cNvSpPr txBox="1"/>
+          <p:nvPr/>
+        </p:nvSpPr>
+        <p:spPr>
+          <a:xfrm>
+            <a:off x="840000" y="2400000"/>
+            <a:ext cx="4906000" cy="3500000"/>
+          </a:xfrm>
+          <a:prstGeom prst="rect">
+            <a:avLst/>
+          </a:prstGeom>
+          <a:noFill/>
+        </p:spPr>
+        <p:txBody>
+          <a:bodyPr wrap="square">
+            <a:spAutoFit/>
+          </a:bodyPr>
+          <a:lstStyle/>
+          <a:p>
+            <a:pPr>
+              <a:spcAft>
+                <a:spcPts val="1170"/>
+              </a:spcAft>
+            </a:pPr>
+            <a:r>
+              <a:rPr sz="2600" b="1">
+                <a:solidFill>
                   <a:srgbClr val="E8793A"/>
                 </a:solidFill>
                 <a:latin typeface="Nunito Sans"/>
@@ -7787,15 +8186,131 @@
               <a:t>• </a:t>
             </a:r>
             <a:r>
-              <a:rPr sz="2800" b="0">
+              <a:rPr sz="2600" b="0">
                 <a:solidFill>
                   <a:srgbClr val="1F2A44"/>
                 </a:solidFill>
                 <a:latin typeface="Nunito Sans"/>
               </a:rPr>
-              <a:t>¿Dónde empieza el eje?</a:t>
-            </a:r>
-          </a:p>
+              <a:t>Buenas o malas</a:t>
+            </a:r>
+          </a:p>
+          <a:p>
+            <a:pPr>
+              <a:spcAft>
+                <a:spcPts val="1170"/>
+              </a:spcAft>
+            </a:pPr>
+            <a:r>
+              <a:rPr sz="2600" b="1">
+                <a:solidFill>
+                  <a:srgbClr val="E8793A"/>
+                </a:solidFill>
+                <a:latin typeface="Nunito Sans"/>
+              </a:rPr>
+              <a:t>• </a:t>
+            </a:r>
+            <a:r>
+              <a:rPr sz="2600" b="0">
+                <a:solidFill>
+                  <a:srgbClr val="1F2A44"/>
+                </a:solidFill>
+                <a:latin typeface="Nunito Sans"/>
+              </a:rPr>
+              <a:t>Órdenes que hay que obedecer</a:t>
+            </a:r>
+          </a:p>
+          <a:p>
+            <a:pPr>
+              <a:spcAft>
+                <a:spcPts val="1170"/>
+              </a:spcAft>
+            </a:pPr>
+            <a:r>
+              <a:rPr sz="2600" b="1">
+                <a:solidFill>
+                  <a:srgbClr val="E8793A"/>
+                </a:solidFill>
+                <a:latin typeface="Nunito Sans"/>
+              </a:rPr>
+              <a:t>• </a:t>
+            </a:r>
+            <a:r>
+              <a:rPr sz="2600" b="0">
+                <a:solidFill>
+                  <a:srgbClr val="1F2A44"/>
+                </a:solidFill>
+                <a:latin typeface="Nunito Sans"/>
+              </a:rPr>
+              <a:t>Siempre verdad</a:t>
+            </a:r>
+          </a:p>
+        </p:txBody>
+      </p:sp>
+      <p:sp>
+        <p:nvSpPr>
+          <p:cNvPr id="7" name="Rectangle 6"/>
+          <p:cNvSpPr/>
+          <p:nvPr/>
+        </p:nvSpPr>
+        <p:spPr>
+          <a:xfrm>
+            <a:off x="6246000" y="1650000"/>
+            <a:ext cx="5306000" cy="4400000"/>
+          </a:xfrm>
+          <a:prstGeom prst="rect">
+            <a:avLst/>
+          </a:prstGeom>
+          <a:solidFill>
+            <a:srgbClr val="EAF0F7"/>
+          </a:solidFill>
+          <a:ln>
+            <a:noFill/>
+          </a:ln>
+        </p:spPr>
+        <p:style>
+          <a:lnRef idx="1">
+            <a:schemeClr val="accent1"/>
+          </a:lnRef>
+          <a:fillRef idx="3">
+            <a:schemeClr val="accent1"/>
+          </a:fillRef>
+          <a:effectRef idx="2">
+            <a:schemeClr val="accent1"/>
+          </a:effectRef>
+          <a:fontRef idx="minor">
+            <a:schemeClr val="lt1"/>
+          </a:fontRef>
+        </p:style>
+        <p:txBody>
+          <a:bodyPr rtlCol="0" anchor="ctr"/>
+          <a:lstStyle/>
+          <a:p>
+            <a:pPr algn="ctr"/>
+          </a:p>
+        </p:txBody>
+      </p:sp>
+      <p:sp>
+        <p:nvSpPr>
+          <p:cNvPr id="8" name="TextBox 7"/>
+          <p:cNvSpPr txBox="1"/>
+          <p:nvPr/>
+        </p:nvSpPr>
+        <p:spPr>
+          <a:xfrm>
+            <a:off x="6446000" y="1750000"/>
+            <a:ext cx="4906000" cy="600000"/>
+          </a:xfrm>
+          <a:prstGeom prst="rect">
+            <a:avLst/>
+          </a:prstGeom>
+          <a:noFill/>
+        </p:spPr>
+        <p:txBody>
+          <a:bodyPr wrap="square">
+            <a:spAutoFit/>
+          </a:bodyPr>
+          <a:lstStyle/>
           <a:p>
             <a:pPr>
               <a:spcAft>
@@ -7805,30 +8320,44 @@
             <a:r>
               <a:rPr sz="2800" b="1">
                 <a:solidFill>
-                  <a:srgbClr val="E8793A"/>
-                </a:solidFill>
-                <a:latin typeface="Nunito Sans"/>
-              </a:rPr>
-              <a:t>• </a:t>
-            </a:r>
-            <a:r>
-              <a:rPr sz="2800" b="0">
-                <a:solidFill>
-                  <a:srgbClr val="1F2A44"/>
-                </a:solidFill>
-                <a:latin typeface="Nunito Sans"/>
-              </a:rPr>
-              <a:t>¿Qué fechas o datos faltan?</a:t>
-            </a:r>
-          </a:p>
+                  <a:srgbClr val="2F6FB5"/>
+                </a:solidFill>
+                <a:latin typeface="Nunito Sans"/>
+              </a:rPr>
+              <a:t>Sí son</a:t>
+            </a:r>
+          </a:p>
+        </p:txBody>
+      </p:sp>
+      <p:sp>
+        <p:nvSpPr>
+          <p:cNvPr id="9" name="TextBox 8"/>
+          <p:cNvSpPr txBox="1"/>
+          <p:nvPr/>
+        </p:nvSpPr>
+        <p:spPr>
+          <a:xfrm>
+            <a:off x="6446000" y="2400000"/>
+            <a:ext cx="4906000" cy="3500000"/>
+          </a:xfrm>
+          <a:prstGeom prst="rect">
+            <a:avLst/>
+          </a:prstGeom>
+          <a:noFill/>
+        </p:spPr>
+        <p:txBody>
+          <a:bodyPr wrap="square">
+            <a:spAutoFit/>
+          </a:bodyPr>
+          <a:lstStyle/>
           <a:p>
             <a:pPr>
               <a:spcAft>
-                <a:spcPts val="1260"/>
+                <a:spcPts val="1170"/>
               </a:spcAft>
             </a:pPr>
             <a:r>
-              <a:rPr sz="2800" b="1">
+              <a:rPr sz="2600" b="1">
                 <a:solidFill>
                   <a:srgbClr val="E8793A"/>
                 </a:solidFill>
@@ -7837,23 +8366,23 @@
               <a:t>• </a:t>
             </a:r>
             <a:r>
-              <a:rPr sz="2800" b="0">
+              <a:rPr sz="2600" b="0">
                 <a:solidFill>
                   <a:srgbClr val="1F2A44"/>
                 </a:solidFill>
                 <a:latin typeface="Nunito Sans"/>
               </a:rPr>
-              <a:t>¿Qué dicen los números, no el dibujo?</a:t>
+              <a:t>Agradables o desagradables</a:t>
             </a:r>
           </a:p>
           <a:p>
             <a:pPr>
               <a:spcAft>
-                <a:spcPts val="1260"/>
+                <a:spcPts val="1170"/>
               </a:spcAft>
             </a:pPr>
             <a:r>
-              <a:rPr sz="2800" b="1">
+              <a:rPr sz="2600" b="1">
                 <a:solidFill>
                   <a:srgbClr val="E8793A"/>
                 </a:solidFill>
@@ -7862,13 +8391,56 @@
               <a:t>• </a:t>
             </a:r>
             <a:r>
-              <a:rPr sz="2800" b="0">
+              <a:rPr sz="2600" b="0">
                 <a:solidFill>
                   <a:srgbClr val="1F2A44"/>
                 </a:solidFill>
                 <a:latin typeface="Nunito Sans"/>
               </a:rPr>
-              <a:t>¿Quién ha hecho el gráfico y qué gana? (sesión 31)</a:t>
+              <a:t>Señales que </a:t>
+            </a:r>
+            <a:r>
+              <a:rPr sz="2600" b="1">
+                <a:solidFill>
+                  <a:srgbClr val="1F2A44"/>
+                </a:solidFill>
+                <a:latin typeface="Nunito Sans"/>
+              </a:rPr>
+              <a:t>informan</a:t>
+            </a:r>
+            <a:r>
+              <a:rPr sz="2600" b="0">
+                <a:solidFill>
+                  <a:srgbClr val="1F2A44"/>
+                </a:solidFill>
+                <a:latin typeface="Nunito Sans"/>
+              </a:rPr>
+              <a:t> de lo que me importa</a:t>
+            </a:r>
+          </a:p>
+          <a:p>
+            <a:pPr>
+              <a:spcAft>
+                <a:spcPts val="1170"/>
+              </a:spcAft>
+            </a:pPr>
+            <a:r>
+              <a:rPr sz="2600" b="1">
+                <a:solidFill>
+                  <a:srgbClr val="E8793A"/>
+                </a:solidFill>
+                <a:latin typeface="Nunito Sans"/>
+              </a:rPr>
+              <a:t>• </a:t>
+            </a:r>
+            <a:r>
+              <a:rPr sz="2600" b="0">
+                <a:solidFill>
+                  <a:srgbClr val="1F2A44"/>
+                </a:solidFill>
+                <a:latin typeface="Nunito Sans"/>
+              </a:rPr>
+              <a:t>Una pista que hay que comprobar: «¿cómo lo sé?»</a:t>
             </a:r>
           </a:p>
         </p:txBody>
